--- a/public/fun/pack/pptx/news/카드뉴스_11_알뜰생활팁_라일락골목.pptx
+++ b/public/fun/pack/pptx/news/카드뉴스_11_알뜰생활팁_라일락골목.pptx
@@ -3287,14 +3287,6 @@
 <file path=ppt/slides/slide1.xml><?xml version="1.0" encoding="utf-8"?>
 <p:sld xmlns:a="http://schemas.openxmlformats.org/drawingml/2006/main" xmlns:p="http://schemas.openxmlformats.org/presentationml/2006/main" xmlns:r="http://schemas.openxmlformats.org/officeDocument/2006/relationships">
   <p:cSld>
-    <p:bg>
-      <p:bgPr>
-        <a:solidFill>
-          <a:srgbClr val="FFFFFF"/>
-        </a:solidFill>
-        <a:effectLst/>
-      </p:bgPr>
-    </p:bg>
     <p:spTree>
       <p:nvGrpSpPr>
         <p:cNvPr id="1" name=""/>
@@ -3302,383 +3294,30 @@
         <p:nvPr/>
       </p:nvGrpSpPr>
       <p:grpSpPr/>
-      <p:sp>
-        <p:nvSpPr>
-          <p:cNvPr id="3" name="장식"/>
-          <p:cNvSpPr/>
+      <p:pic>
+        <p:nvPicPr>
+          <p:cNvPr id="3" name="표지 그림" descr="news-11.jpg"/>
+          <p:cNvPicPr>
+            <a:picLocks noChangeAspect="1"/>
+          </p:cNvPicPr>
           <p:nvPr/>
-        </p:nvSpPr>
-        <p:spPr>
-          <a:xfrm>
-            <a:off x="3977639" y="-1714500"/>
-            <a:ext cx="7886700" cy="7886700"/>
-          </a:xfrm>
-          <a:prstGeom prst="ellipse">
+        </p:nvPicPr>
+        <p:blipFill>
+          <a:blip r:embed="rId2"/>
+          <a:stretch>
+            <a:fillRect/>
+          </a:stretch>
+        </p:blipFill>
+        <p:spPr>
+          <a:xfrm>
+            <a:off x="0" y="0"/>
+            <a:ext cx="6858000" cy="6858000"/>
+          </a:xfrm>
+          <a:prstGeom prst="rect">
             <a:avLst/>
           </a:prstGeom>
-          <a:solidFill>
-            <a:srgbClr val="E3D3EE"/>
-          </a:solidFill>
-          <a:ln>
-            <a:noFill/>
-          </a:ln>
-        </p:spPr>
-        <p:txBody>
-          <a:bodyPr rtlCol="0" anchor="ctr"/>
-          <a:lstStyle/>
-          <a:p>
-            <a:pPr algn="ctr"/>
-          </a:p>
-        </p:txBody>
-      </p:sp>
-      <p:sp>
-        <p:nvSpPr>
-          <p:cNvPr id="4" name="장식"/>
-          <p:cNvSpPr/>
-          <p:nvPr/>
-        </p:nvSpPr>
-        <p:spPr>
-          <a:xfrm>
-            <a:off x="5349240" y="3977639"/>
-            <a:ext cx="3429000" cy="3429000"/>
-          </a:xfrm>
-          <a:prstGeom prst="ellipse">
-            <a:avLst/>
-          </a:prstGeom>
-          <a:solidFill>
-            <a:srgbClr val="8C56B3"/>
-          </a:solidFill>
-          <a:ln>
-            <a:noFill/>
-          </a:ln>
-        </p:spPr>
-        <p:txBody>
-          <a:bodyPr rtlCol="0" anchor="ctr"/>
-          <a:lstStyle/>
-          <a:p>
-            <a:pPr algn="ctr"/>
-          </a:p>
-        </p:txBody>
-      </p:sp>
-      <p:sp>
-        <p:nvSpPr>
-          <p:cNvPr id="5" name="장식"/>
-          <p:cNvSpPr/>
-          <p:nvPr/>
-        </p:nvSpPr>
-        <p:spPr>
-          <a:xfrm>
-            <a:off x="4281138" y="665468"/>
-            <a:ext cx="439711" cy="439711"/>
-          </a:xfrm>
-          <a:prstGeom prst="ellipse">
-            <a:avLst/>
-          </a:prstGeom>
-          <a:solidFill>
-            <a:srgbClr val="8C56B3"/>
-          </a:solidFill>
-          <a:ln>
-            <a:noFill/>
-          </a:ln>
-        </p:spPr>
-        <p:txBody>
-          <a:bodyPr rtlCol="0" anchor="ctr"/>
-          <a:lstStyle/>
-          <a:p>
-            <a:pPr algn="ctr"/>
-          </a:p>
-        </p:txBody>
-      </p:sp>
-      <p:sp>
-        <p:nvSpPr>
-          <p:cNvPr id="6" name="장식"/>
-          <p:cNvSpPr/>
-          <p:nvPr/>
-        </p:nvSpPr>
-        <p:spPr>
-          <a:xfrm>
-            <a:off x="5603218" y="2648211"/>
-            <a:ext cx="325546" cy="325546"/>
-          </a:xfrm>
-          <a:prstGeom prst="ellipse">
-            <a:avLst/>
-          </a:prstGeom>
-          <a:solidFill>
-            <a:srgbClr val="E3D3EE"/>
-          </a:solidFill>
-          <a:ln>
-            <a:noFill/>
-          </a:ln>
-        </p:spPr>
-        <p:txBody>
-          <a:bodyPr rtlCol="0" anchor="ctr"/>
-          <a:lstStyle/>
-          <a:p>
-            <a:pPr algn="ctr"/>
-          </a:p>
-        </p:txBody>
-      </p:sp>
-      <p:sp>
-        <p:nvSpPr>
-          <p:cNvPr id="7" name="장식"/>
-          <p:cNvSpPr/>
-          <p:nvPr/>
-        </p:nvSpPr>
-        <p:spPr>
-          <a:xfrm>
-            <a:off x="6189946" y="844189"/>
-            <a:ext cx="428847" cy="428847"/>
-          </a:xfrm>
-          <a:prstGeom prst="ellipse">
-            <a:avLst/>
-          </a:prstGeom>
-          <a:solidFill>
-            <a:srgbClr val="868D3F"/>
-          </a:solidFill>
-          <a:ln>
-            <a:noFill/>
-          </a:ln>
-        </p:spPr>
-        <p:txBody>
-          <a:bodyPr rtlCol="0" anchor="ctr"/>
-          <a:lstStyle/>
-          <a:p>
-            <a:pPr algn="ctr"/>
-          </a:p>
-        </p:txBody>
-      </p:sp>
-      <p:sp>
-        <p:nvSpPr>
-          <p:cNvPr id="8" name="장식"/>
-          <p:cNvSpPr/>
-          <p:nvPr/>
-        </p:nvSpPr>
-        <p:spPr>
-          <a:xfrm>
-            <a:off x="6060927" y="2558810"/>
-            <a:ext cx="383917" cy="383917"/>
-          </a:xfrm>
-          <a:prstGeom prst="ellipse">
-            <a:avLst/>
-          </a:prstGeom>
-          <a:solidFill>
-            <a:srgbClr val="8C56B3"/>
-          </a:solidFill>
-          <a:ln>
-            <a:noFill/>
-          </a:ln>
-        </p:spPr>
-        <p:txBody>
-          <a:bodyPr rtlCol="0" anchor="ctr"/>
-          <a:lstStyle/>
-          <a:p>
-            <a:pPr algn="ctr"/>
-          </a:p>
-        </p:txBody>
-      </p:sp>
-      <p:sp>
-        <p:nvSpPr>
-          <p:cNvPr id="9" name="장식"/>
-          <p:cNvSpPr/>
-          <p:nvPr/>
-        </p:nvSpPr>
-        <p:spPr>
-          <a:xfrm>
-            <a:off x="4718267" y="371263"/>
-            <a:ext cx="271256" cy="271256"/>
-          </a:xfrm>
-          <a:prstGeom prst="ellipse">
-            <a:avLst/>
-          </a:prstGeom>
-          <a:solidFill>
-            <a:srgbClr val="E3D3EE"/>
-          </a:solidFill>
-          <a:ln>
-            <a:noFill/>
-          </a:ln>
-        </p:spPr>
-        <p:txBody>
-          <a:bodyPr rtlCol="0" anchor="ctr"/>
-          <a:lstStyle/>
-          <a:p>
-            <a:pPr algn="ctr"/>
-          </a:p>
-        </p:txBody>
-      </p:sp>
-      <p:sp>
-        <p:nvSpPr>
-          <p:cNvPr id="10" name="장식"/>
-          <p:cNvSpPr/>
-          <p:nvPr/>
-        </p:nvSpPr>
-        <p:spPr>
-          <a:xfrm>
-            <a:off x="5787680" y="427995"/>
-            <a:ext cx="294091" cy="294091"/>
-          </a:xfrm>
-          <a:prstGeom prst="ellipse">
-            <a:avLst/>
-          </a:prstGeom>
-          <a:solidFill>
-            <a:srgbClr val="868D3F"/>
-          </a:solidFill>
-          <a:ln>
-            <a:noFill/>
-          </a:ln>
-        </p:spPr>
-        <p:txBody>
-          <a:bodyPr rtlCol="0" anchor="ctr"/>
-          <a:lstStyle/>
-          <a:p>
-            <a:pPr algn="ctr"/>
-          </a:p>
-        </p:txBody>
-      </p:sp>
-      <p:sp>
-        <p:nvSpPr>
-          <p:cNvPr id="11" name="장식"/>
-          <p:cNvSpPr/>
-          <p:nvPr/>
-        </p:nvSpPr>
-        <p:spPr>
-          <a:xfrm>
-            <a:off x="6272278" y="2844566"/>
-            <a:ext cx="506986" cy="506986"/>
-          </a:xfrm>
-          <a:prstGeom prst="ellipse">
-            <a:avLst/>
-          </a:prstGeom>
-          <a:solidFill>
-            <a:srgbClr val="8C56B3"/>
-          </a:solidFill>
-          <a:ln>
-            <a:noFill/>
-          </a:ln>
-        </p:spPr>
-        <p:txBody>
-          <a:bodyPr rtlCol="0" anchor="ctr"/>
-          <a:lstStyle/>
-          <a:p>
-            <a:pPr algn="ctr"/>
-          </a:p>
-        </p:txBody>
-      </p:sp>
-      <p:sp>
-        <p:nvSpPr>
-          <p:cNvPr id="12" name="장식"/>
-          <p:cNvSpPr/>
-          <p:nvPr/>
-        </p:nvSpPr>
-        <p:spPr>
-          <a:xfrm>
-            <a:off x="5447721" y="793042"/>
-            <a:ext cx="486841" cy="486841"/>
-          </a:xfrm>
-          <a:prstGeom prst="ellipse">
-            <a:avLst/>
-          </a:prstGeom>
-          <a:solidFill>
-            <a:srgbClr val="E3D3EE"/>
-          </a:solidFill>
-          <a:ln>
-            <a:noFill/>
-          </a:ln>
-        </p:spPr>
-        <p:txBody>
-          <a:bodyPr rtlCol="0" anchor="ctr"/>
-          <a:lstStyle/>
-          <a:p>
-            <a:pPr algn="ctr"/>
-          </a:p>
-        </p:txBody>
-      </p:sp>
-      <p:sp>
-        <p:nvSpPr>
-          <p:cNvPr id="13" name="장식"/>
-          <p:cNvSpPr/>
-          <p:nvPr/>
-        </p:nvSpPr>
-        <p:spPr>
-          <a:xfrm>
-            <a:off x="4826848" y="730731"/>
-            <a:ext cx="496258" cy="496258"/>
-          </a:xfrm>
-          <a:prstGeom prst="ellipse">
-            <a:avLst/>
-          </a:prstGeom>
-          <a:solidFill>
-            <a:srgbClr val="868D3F"/>
-          </a:solidFill>
-          <a:ln>
-            <a:noFill/>
-          </a:ln>
-        </p:spPr>
-        <p:txBody>
-          <a:bodyPr rtlCol="0" anchor="ctr"/>
-          <a:lstStyle/>
-          <a:p>
-            <a:pPr algn="ctr"/>
-          </a:p>
-        </p:txBody>
-      </p:sp>
-      <p:sp>
-        <p:nvSpPr>
-          <p:cNvPr id="14" name="장식"/>
-          <p:cNvSpPr/>
-          <p:nvPr/>
-        </p:nvSpPr>
-        <p:spPr>
-          <a:xfrm>
-            <a:off x="3996532" y="21126"/>
-            <a:ext cx="405194" cy="405194"/>
-          </a:xfrm>
-          <a:prstGeom prst="ellipse">
-            <a:avLst/>
-          </a:prstGeom>
-          <a:solidFill>
-            <a:srgbClr val="8C56B3"/>
-          </a:solidFill>
-          <a:ln>
-            <a:noFill/>
-          </a:ln>
-        </p:spPr>
-        <p:txBody>
-          <a:bodyPr rtlCol="0" anchor="ctr"/>
-          <a:lstStyle/>
-          <a:p>
-            <a:pPr algn="ctr"/>
-          </a:p>
-        </p:txBody>
-      </p:sp>
-      <p:sp>
-        <p:nvSpPr>
-          <p:cNvPr id="15" name="장식"/>
-          <p:cNvSpPr/>
-          <p:nvPr/>
-        </p:nvSpPr>
-        <p:spPr>
-          <a:xfrm>
-            <a:off x="6286993" y="2861152"/>
-            <a:ext cx="241523" cy="241523"/>
-          </a:xfrm>
-          <a:prstGeom prst="ellipse">
-            <a:avLst/>
-          </a:prstGeom>
-          <a:solidFill>
-            <a:srgbClr val="E3D3EE"/>
-          </a:solidFill>
-          <a:ln>
-            <a:noFill/>
-          </a:ln>
-        </p:spPr>
-        <p:txBody>
-          <a:bodyPr rtlCol="0" anchor="ctr"/>
-          <a:lstStyle/>
-          <a:p>
-            <a:pPr algn="ctr"/>
-          </a:p>
-        </p:txBody>
-      </p:sp>
+        </p:spPr>
+      </p:pic>
       <p:sp>
         <p:nvSpPr>
           <p:cNvPr id="2" name="Title 1"/>
@@ -3691,8 +3330,8 @@
         </p:nvSpPr>
         <p:spPr>
           <a:xfrm>
-            <a:off x="480060" y="2057400"/>
-            <a:ext cx="3771900" cy="1463040"/>
+            <a:off x="685800" y="960120"/>
+            <a:ext cx="5486400" cy="1463040"/>
           </a:xfrm>
         </p:spPr>
         <p:txBody>
@@ -3712,21 +3351,21 @@
                   <a:srgbClr val="573371"/>
                 </a:solidFill>
               </a:rPr>
-              <a:t>향기로운 5월의 소소한 팁</a:t>
-            </a:r>
-          </a:p>
-        </p:txBody>
-      </p:sp>
-      <p:sp>
-        <p:nvSpPr>
-          <p:cNvPr id="16" name="한 줄 문구"/>
+              <a:t>장보기 전에 냉장고부터 열어 보세요</a:t>
+            </a:r>
+          </a:p>
+        </p:txBody>
+      </p:sp>
+      <p:sp>
+        <p:nvSpPr>
+          <p:cNvPr id="4" name="한 줄 문구"/>
           <p:cNvSpPr txBox="1"/>
           <p:nvPr/>
         </p:nvSpPr>
         <p:spPr>
           <a:xfrm>
-            <a:off x="480060" y="3611880"/>
-            <a:ext cx="3429000" cy="822960"/>
+            <a:off x="685800" y="2560320"/>
+            <a:ext cx="5486400" cy="822960"/>
           </a:xfrm>
           <a:prstGeom prst="rect">
             <a:avLst/>
@@ -3757,14 +3396,14 @@
       </p:sp>
       <p:sp>
         <p:nvSpPr>
-          <p:cNvPr id="17" name="안내 문구"/>
+          <p:cNvPr id="5" name="안내 문구"/>
           <p:cNvSpPr txBox="1"/>
           <p:nvPr/>
         </p:nvSpPr>
         <p:spPr>
           <a:xfrm>
-            <a:off x="480060" y="4480560"/>
-            <a:ext cx="3429000" cy="914400"/>
+            <a:off x="685800" y="3429000"/>
+            <a:ext cx="5486400" cy="914400"/>
           </a:xfrm>
           <a:prstGeom prst="rect">
             <a:avLst/>
@@ -3879,325 +3518,6 @@
       </p:sp>
       <p:sp>
         <p:nvSpPr>
-          <p:cNvPr id="5" name="장식"/>
-          <p:cNvSpPr/>
-          <p:nvPr/>
-        </p:nvSpPr>
-        <p:spPr>
-          <a:xfrm>
-            <a:off x="5568434" y="434860"/>
-            <a:ext cx="153549" cy="153549"/>
-          </a:xfrm>
-          <a:prstGeom prst="ellipse">
-            <a:avLst/>
-          </a:prstGeom>
-          <a:solidFill>
-            <a:srgbClr val="8C56B3"/>
-          </a:solidFill>
-          <a:ln>
-            <a:noFill/>
-          </a:ln>
-        </p:spPr>
-        <p:txBody>
-          <a:bodyPr rtlCol="0" anchor="ctr"/>
-          <a:lstStyle/>
-          <a:p>
-            <a:pPr algn="ctr"/>
-          </a:p>
-        </p:txBody>
-      </p:sp>
-      <p:sp>
-        <p:nvSpPr>
-          <p:cNvPr id="6" name="장식"/>
-          <p:cNvSpPr/>
-          <p:nvPr/>
-        </p:nvSpPr>
-        <p:spPr>
-          <a:xfrm>
-            <a:off x="6030113" y="1127246"/>
-            <a:ext cx="113682" cy="113682"/>
-          </a:xfrm>
-          <a:prstGeom prst="ellipse">
-            <a:avLst/>
-          </a:prstGeom>
-          <a:solidFill>
-            <a:srgbClr val="E3D3EE"/>
-          </a:solidFill>
-          <a:ln>
-            <a:noFill/>
-          </a:ln>
-        </p:spPr>
-        <p:txBody>
-          <a:bodyPr rtlCol="0" anchor="ctr"/>
-          <a:lstStyle/>
-          <a:p>
-            <a:pPr algn="ctr"/>
-          </a:p>
-        </p:txBody>
-      </p:sp>
-      <p:sp>
-        <p:nvSpPr>
-          <p:cNvPr id="7" name="장식"/>
-          <p:cNvSpPr/>
-          <p:nvPr/>
-        </p:nvSpPr>
-        <p:spPr>
-          <a:xfrm>
-            <a:off x="6235002" y="497270"/>
-            <a:ext cx="149756" cy="149756"/>
-          </a:xfrm>
-          <a:prstGeom prst="ellipse">
-            <a:avLst/>
-          </a:prstGeom>
-          <a:solidFill>
-            <a:srgbClr val="868D3F"/>
-          </a:solidFill>
-          <a:ln>
-            <a:noFill/>
-          </a:ln>
-        </p:spPr>
-        <p:txBody>
-          <a:bodyPr rtlCol="0" anchor="ctr"/>
-          <a:lstStyle/>
-          <a:p>
-            <a:pPr algn="ctr"/>
-          </a:p>
-        </p:txBody>
-      </p:sp>
-      <p:sp>
-        <p:nvSpPr>
-          <p:cNvPr id="8" name="장식"/>
-          <p:cNvSpPr/>
-          <p:nvPr/>
-        </p:nvSpPr>
-        <p:spPr>
-          <a:xfrm>
-            <a:off x="6189948" y="1096027"/>
-            <a:ext cx="134066" cy="134066"/>
-          </a:xfrm>
-          <a:prstGeom prst="ellipse">
-            <a:avLst/>
-          </a:prstGeom>
-          <a:solidFill>
-            <a:srgbClr val="8C56B3"/>
-          </a:solidFill>
-          <a:ln>
-            <a:noFill/>
-          </a:ln>
-        </p:spPr>
-        <p:txBody>
-          <a:bodyPr rtlCol="0" anchor="ctr"/>
-          <a:lstStyle/>
-          <a:p>
-            <a:pPr algn="ctr"/>
-          </a:p>
-        </p:txBody>
-      </p:sp>
-      <p:sp>
-        <p:nvSpPr>
-          <p:cNvPr id="9" name="장식"/>
-          <p:cNvSpPr/>
-          <p:nvPr/>
-        </p:nvSpPr>
-        <p:spPr>
-          <a:xfrm>
-            <a:off x="5721083" y="332121"/>
-            <a:ext cx="94724" cy="94724"/>
-          </a:xfrm>
-          <a:prstGeom prst="ellipse">
-            <a:avLst/>
-          </a:prstGeom>
-          <a:solidFill>
-            <a:srgbClr val="E3D3EE"/>
-          </a:solidFill>
-          <a:ln>
-            <a:noFill/>
-          </a:ln>
-        </p:spPr>
-        <p:txBody>
-          <a:bodyPr rtlCol="0" anchor="ctr"/>
-          <a:lstStyle/>
-          <a:p>
-            <a:pPr algn="ctr"/>
-          </a:p>
-        </p:txBody>
-      </p:sp>
-      <p:sp>
-        <p:nvSpPr>
-          <p:cNvPr id="10" name="장식"/>
-          <p:cNvSpPr/>
-          <p:nvPr/>
-        </p:nvSpPr>
-        <p:spPr>
-          <a:xfrm>
-            <a:off x="6094529" y="351933"/>
-            <a:ext cx="102698" cy="102698"/>
-          </a:xfrm>
-          <a:prstGeom prst="ellipse">
-            <a:avLst/>
-          </a:prstGeom>
-          <a:solidFill>
-            <a:srgbClr val="868D3F"/>
-          </a:solidFill>
-          <a:ln>
-            <a:noFill/>
-          </a:ln>
-        </p:spPr>
-        <p:txBody>
-          <a:bodyPr rtlCol="0" anchor="ctr"/>
-          <a:lstStyle/>
-          <a:p>
-            <a:pPr algn="ctr"/>
-          </a:p>
-        </p:txBody>
-      </p:sp>
-      <p:sp>
-        <p:nvSpPr>
-          <p:cNvPr id="11" name="장식"/>
-          <p:cNvSpPr/>
-          <p:nvPr/>
-        </p:nvSpPr>
-        <p:spPr>
-          <a:xfrm>
-            <a:off x="6263753" y="1195815"/>
-            <a:ext cx="177042" cy="177042"/>
-          </a:xfrm>
-          <a:prstGeom prst="ellipse">
-            <a:avLst/>
-          </a:prstGeom>
-          <a:solidFill>
-            <a:srgbClr val="8C56B3"/>
-          </a:solidFill>
-          <a:ln>
-            <a:noFill/>
-          </a:ln>
-        </p:spPr>
-        <p:txBody>
-          <a:bodyPr rtlCol="0" anchor="ctr"/>
-          <a:lstStyle/>
-          <a:p>
-            <a:pPr algn="ctr"/>
-          </a:p>
-        </p:txBody>
-      </p:sp>
-      <p:sp>
-        <p:nvSpPr>
-          <p:cNvPr id="12" name="장식"/>
-          <p:cNvSpPr/>
-          <p:nvPr/>
-        </p:nvSpPr>
-        <p:spPr>
-          <a:xfrm>
-            <a:off x="5975813" y="479409"/>
-            <a:ext cx="170008" cy="170008"/>
-          </a:xfrm>
-          <a:prstGeom prst="ellipse">
-            <a:avLst/>
-          </a:prstGeom>
-          <a:solidFill>
-            <a:srgbClr val="E3D3EE"/>
-          </a:solidFill>
-          <a:ln>
-            <a:noFill/>
-          </a:ln>
-        </p:spPr>
-        <p:txBody>
-          <a:bodyPr rtlCol="0" anchor="ctr"/>
-          <a:lstStyle/>
-          <a:p>
-            <a:pPr algn="ctr"/>
-          </a:p>
-        </p:txBody>
-      </p:sp>
-      <p:sp>
-        <p:nvSpPr>
-          <p:cNvPr id="13" name="장식"/>
-          <p:cNvSpPr/>
-          <p:nvPr/>
-        </p:nvSpPr>
-        <p:spPr>
-          <a:xfrm>
-            <a:off x="5759000" y="457650"/>
-            <a:ext cx="173296" cy="173296"/>
-          </a:xfrm>
-          <a:prstGeom prst="ellipse">
-            <a:avLst/>
-          </a:prstGeom>
-          <a:solidFill>
-            <a:srgbClr val="868D3F"/>
-          </a:solidFill>
-          <a:ln>
-            <a:noFill/>
-          </a:ln>
-        </p:spPr>
-        <p:txBody>
-          <a:bodyPr rtlCol="0" anchor="ctr"/>
-          <a:lstStyle/>
-          <a:p>
-            <a:pPr algn="ctr"/>
-          </a:p>
-        </p:txBody>
-      </p:sp>
-      <p:sp>
-        <p:nvSpPr>
-          <p:cNvPr id="14" name="장식"/>
-          <p:cNvSpPr/>
-          <p:nvPr/>
-        </p:nvSpPr>
-        <p:spPr>
-          <a:xfrm>
-            <a:off x="5469048" y="209851"/>
-            <a:ext cx="141496" cy="141496"/>
-          </a:xfrm>
-          <a:prstGeom prst="ellipse">
-            <a:avLst/>
-          </a:prstGeom>
-          <a:solidFill>
-            <a:srgbClr val="8C56B3"/>
-          </a:solidFill>
-          <a:ln>
-            <a:noFill/>
-          </a:ln>
-        </p:spPr>
-        <p:txBody>
-          <a:bodyPr rtlCol="0" anchor="ctr"/>
-          <a:lstStyle/>
-          <a:p>
-            <a:pPr algn="ctr"/>
-          </a:p>
-        </p:txBody>
-      </p:sp>
-      <p:sp>
-        <p:nvSpPr>
-          <p:cNvPr id="15" name="장식"/>
-          <p:cNvSpPr/>
-          <p:nvPr/>
-        </p:nvSpPr>
-        <p:spPr>
-          <a:xfrm>
-            <a:off x="6268892" y="1201606"/>
-            <a:ext cx="84341" cy="84341"/>
-          </a:xfrm>
-          <a:prstGeom prst="ellipse">
-            <a:avLst/>
-          </a:prstGeom>
-          <a:solidFill>
-            <a:srgbClr val="E3D3EE"/>
-          </a:solidFill>
-          <a:ln>
-            <a:noFill/>
-          </a:ln>
-        </p:spPr>
-        <p:txBody>
-          <a:bodyPr rtlCol="0" anchor="ctr"/>
-          <a:lstStyle/>
-          <a:p>
-            <a:pPr algn="ctr"/>
-          </a:p>
-        </p:txBody>
-      </p:sp>
-      <p:sp>
-        <p:nvSpPr>
           <p:cNvPr id="2" name="Title 1"/>
           <p:cNvSpPr>
             <a:spLocks noGrp="1"/>
@@ -4236,7 +3556,7 @@
       </p:sp>
       <p:sp>
         <p:nvSpPr>
-          <p:cNvPr id="16" name="번호"/>
+          <p:cNvPr id="5" name="번호"/>
           <p:cNvSpPr txBox="1"/>
           <p:nvPr/>
         </p:nvSpPr>
@@ -4274,7 +3594,7 @@
       </p:sp>
       <p:sp>
         <p:nvSpPr>
-          <p:cNvPr id="17" name="본문"/>
+          <p:cNvPr id="6" name="본문"/>
           <p:cNvSpPr txBox="1"/>
           <p:nvPr/>
         </p:nvSpPr>
@@ -4312,7 +3632,7 @@
       </p:sp>
       <p:sp>
         <p:nvSpPr>
-          <p:cNvPr id="18" name="쪽 번호"/>
+          <p:cNvPr id="7" name="쪽 번호"/>
           <p:cNvSpPr txBox="1"/>
           <p:nvPr/>
         </p:nvSpPr>
@@ -4434,325 +3754,6 @@
       </p:sp>
       <p:sp>
         <p:nvSpPr>
-          <p:cNvPr id="5" name="장식"/>
-          <p:cNvSpPr/>
-          <p:nvPr/>
-        </p:nvSpPr>
-        <p:spPr>
-          <a:xfrm>
-            <a:off x="5568434" y="434860"/>
-            <a:ext cx="153549" cy="153549"/>
-          </a:xfrm>
-          <a:prstGeom prst="ellipse">
-            <a:avLst/>
-          </a:prstGeom>
-          <a:solidFill>
-            <a:srgbClr val="8C56B3"/>
-          </a:solidFill>
-          <a:ln>
-            <a:noFill/>
-          </a:ln>
-        </p:spPr>
-        <p:txBody>
-          <a:bodyPr rtlCol="0" anchor="ctr"/>
-          <a:lstStyle/>
-          <a:p>
-            <a:pPr algn="ctr"/>
-          </a:p>
-        </p:txBody>
-      </p:sp>
-      <p:sp>
-        <p:nvSpPr>
-          <p:cNvPr id="6" name="장식"/>
-          <p:cNvSpPr/>
-          <p:nvPr/>
-        </p:nvSpPr>
-        <p:spPr>
-          <a:xfrm>
-            <a:off x="6030113" y="1127246"/>
-            <a:ext cx="113682" cy="113682"/>
-          </a:xfrm>
-          <a:prstGeom prst="ellipse">
-            <a:avLst/>
-          </a:prstGeom>
-          <a:solidFill>
-            <a:srgbClr val="E3D3EE"/>
-          </a:solidFill>
-          <a:ln>
-            <a:noFill/>
-          </a:ln>
-        </p:spPr>
-        <p:txBody>
-          <a:bodyPr rtlCol="0" anchor="ctr"/>
-          <a:lstStyle/>
-          <a:p>
-            <a:pPr algn="ctr"/>
-          </a:p>
-        </p:txBody>
-      </p:sp>
-      <p:sp>
-        <p:nvSpPr>
-          <p:cNvPr id="7" name="장식"/>
-          <p:cNvSpPr/>
-          <p:nvPr/>
-        </p:nvSpPr>
-        <p:spPr>
-          <a:xfrm>
-            <a:off x="6235002" y="497270"/>
-            <a:ext cx="149756" cy="149756"/>
-          </a:xfrm>
-          <a:prstGeom prst="ellipse">
-            <a:avLst/>
-          </a:prstGeom>
-          <a:solidFill>
-            <a:srgbClr val="868D3F"/>
-          </a:solidFill>
-          <a:ln>
-            <a:noFill/>
-          </a:ln>
-        </p:spPr>
-        <p:txBody>
-          <a:bodyPr rtlCol="0" anchor="ctr"/>
-          <a:lstStyle/>
-          <a:p>
-            <a:pPr algn="ctr"/>
-          </a:p>
-        </p:txBody>
-      </p:sp>
-      <p:sp>
-        <p:nvSpPr>
-          <p:cNvPr id="8" name="장식"/>
-          <p:cNvSpPr/>
-          <p:nvPr/>
-        </p:nvSpPr>
-        <p:spPr>
-          <a:xfrm>
-            <a:off x="6189948" y="1096027"/>
-            <a:ext cx="134066" cy="134066"/>
-          </a:xfrm>
-          <a:prstGeom prst="ellipse">
-            <a:avLst/>
-          </a:prstGeom>
-          <a:solidFill>
-            <a:srgbClr val="8C56B3"/>
-          </a:solidFill>
-          <a:ln>
-            <a:noFill/>
-          </a:ln>
-        </p:spPr>
-        <p:txBody>
-          <a:bodyPr rtlCol="0" anchor="ctr"/>
-          <a:lstStyle/>
-          <a:p>
-            <a:pPr algn="ctr"/>
-          </a:p>
-        </p:txBody>
-      </p:sp>
-      <p:sp>
-        <p:nvSpPr>
-          <p:cNvPr id="9" name="장식"/>
-          <p:cNvSpPr/>
-          <p:nvPr/>
-        </p:nvSpPr>
-        <p:spPr>
-          <a:xfrm>
-            <a:off x="5721083" y="332121"/>
-            <a:ext cx="94724" cy="94724"/>
-          </a:xfrm>
-          <a:prstGeom prst="ellipse">
-            <a:avLst/>
-          </a:prstGeom>
-          <a:solidFill>
-            <a:srgbClr val="E3D3EE"/>
-          </a:solidFill>
-          <a:ln>
-            <a:noFill/>
-          </a:ln>
-        </p:spPr>
-        <p:txBody>
-          <a:bodyPr rtlCol="0" anchor="ctr"/>
-          <a:lstStyle/>
-          <a:p>
-            <a:pPr algn="ctr"/>
-          </a:p>
-        </p:txBody>
-      </p:sp>
-      <p:sp>
-        <p:nvSpPr>
-          <p:cNvPr id="10" name="장식"/>
-          <p:cNvSpPr/>
-          <p:nvPr/>
-        </p:nvSpPr>
-        <p:spPr>
-          <a:xfrm>
-            <a:off x="6094529" y="351933"/>
-            <a:ext cx="102698" cy="102698"/>
-          </a:xfrm>
-          <a:prstGeom prst="ellipse">
-            <a:avLst/>
-          </a:prstGeom>
-          <a:solidFill>
-            <a:srgbClr val="868D3F"/>
-          </a:solidFill>
-          <a:ln>
-            <a:noFill/>
-          </a:ln>
-        </p:spPr>
-        <p:txBody>
-          <a:bodyPr rtlCol="0" anchor="ctr"/>
-          <a:lstStyle/>
-          <a:p>
-            <a:pPr algn="ctr"/>
-          </a:p>
-        </p:txBody>
-      </p:sp>
-      <p:sp>
-        <p:nvSpPr>
-          <p:cNvPr id="11" name="장식"/>
-          <p:cNvSpPr/>
-          <p:nvPr/>
-        </p:nvSpPr>
-        <p:spPr>
-          <a:xfrm>
-            <a:off x="6263753" y="1195815"/>
-            <a:ext cx="177042" cy="177042"/>
-          </a:xfrm>
-          <a:prstGeom prst="ellipse">
-            <a:avLst/>
-          </a:prstGeom>
-          <a:solidFill>
-            <a:srgbClr val="8C56B3"/>
-          </a:solidFill>
-          <a:ln>
-            <a:noFill/>
-          </a:ln>
-        </p:spPr>
-        <p:txBody>
-          <a:bodyPr rtlCol="0" anchor="ctr"/>
-          <a:lstStyle/>
-          <a:p>
-            <a:pPr algn="ctr"/>
-          </a:p>
-        </p:txBody>
-      </p:sp>
-      <p:sp>
-        <p:nvSpPr>
-          <p:cNvPr id="12" name="장식"/>
-          <p:cNvSpPr/>
-          <p:nvPr/>
-        </p:nvSpPr>
-        <p:spPr>
-          <a:xfrm>
-            <a:off x="5975813" y="479409"/>
-            <a:ext cx="170008" cy="170008"/>
-          </a:xfrm>
-          <a:prstGeom prst="ellipse">
-            <a:avLst/>
-          </a:prstGeom>
-          <a:solidFill>
-            <a:srgbClr val="E3D3EE"/>
-          </a:solidFill>
-          <a:ln>
-            <a:noFill/>
-          </a:ln>
-        </p:spPr>
-        <p:txBody>
-          <a:bodyPr rtlCol="0" anchor="ctr"/>
-          <a:lstStyle/>
-          <a:p>
-            <a:pPr algn="ctr"/>
-          </a:p>
-        </p:txBody>
-      </p:sp>
-      <p:sp>
-        <p:nvSpPr>
-          <p:cNvPr id="13" name="장식"/>
-          <p:cNvSpPr/>
-          <p:nvPr/>
-        </p:nvSpPr>
-        <p:spPr>
-          <a:xfrm>
-            <a:off x="5759000" y="457650"/>
-            <a:ext cx="173296" cy="173296"/>
-          </a:xfrm>
-          <a:prstGeom prst="ellipse">
-            <a:avLst/>
-          </a:prstGeom>
-          <a:solidFill>
-            <a:srgbClr val="868D3F"/>
-          </a:solidFill>
-          <a:ln>
-            <a:noFill/>
-          </a:ln>
-        </p:spPr>
-        <p:txBody>
-          <a:bodyPr rtlCol="0" anchor="ctr"/>
-          <a:lstStyle/>
-          <a:p>
-            <a:pPr algn="ctr"/>
-          </a:p>
-        </p:txBody>
-      </p:sp>
-      <p:sp>
-        <p:nvSpPr>
-          <p:cNvPr id="14" name="장식"/>
-          <p:cNvSpPr/>
-          <p:nvPr/>
-        </p:nvSpPr>
-        <p:spPr>
-          <a:xfrm>
-            <a:off x="5469048" y="209851"/>
-            <a:ext cx="141496" cy="141496"/>
-          </a:xfrm>
-          <a:prstGeom prst="ellipse">
-            <a:avLst/>
-          </a:prstGeom>
-          <a:solidFill>
-            <a:srgbClr val="8C56B3"/>
-          </a:solidFill>
-          <a:ln>
-            <a:noFill/>
-          </a:ln>
-        </p:spPr>
-        <p:txBody>
-          <a:bodyPr rtlCol="0" anchor="ctr"/>
-          <a:lstStyle/>
-          <a:p>
-            <a:pPr algn="ctr"/>
-          </a:p>
-        </p:txBody>
-      </p:sp>
-      <p:sp>
-        <p:nvSpPr>
-          <p:cNvPr id="15" name="장식"/>
-          <p:cNvSpPr/>
-          <p:nvPr/>
-        </p:nvSpPr>
-        <p:spPr>
-          <a:xfrm>
-            <a:off x="6268892" y="1201606"/>
-            <a:ext cx="84341" cy="84341"/>
-          </a:xfrm>
-          <a:prstGeom prst="ellipse">
-            <a:avLst/>
-          </a:prstGeom>
-          <a:solidFill>
-            <a:srgbClr val="E3D3EE"/>
-          </a:solidFill>
-          <a:ln>
-            <a:noFill/>
-          </a:ln>
-        </p:spPr>
-        <p:txBody>
-          <a:bodyPr rtlCol="0" anchor="ctr"/>
-          <a:lstStyle/>
-          <a:p>
-            <a:pPr algn="ctr"/>
-          </a:p>
-        </p:txBody>
-      </p:sp>
-      <p:sp>
-        <p:nvSpPr>
           <p:cNvPr id="2" name="Title 1"/>
           <p:cNvSpPr>
             <a:spLocks noGrp="1"/>
@@ -4791,7 +3792,7 @@
       </p:sp>
       <p:sp>
         <p:nvSpPr>
-          <p:cNvPr id="16" name="번호"/>
+          <p:cNvPr id="5" name="번호"/>
           <p:cNvSpPr txBox="1"/>
           <p:nvPr/>
         </p:nvSpPr>
@@ -4829,7 +3830,7 @@
       </p:sp>
       <p:sp>
         <p:nvSpPr>
-          <p:cNvPr id="17" name="본문"/>
+          <p:cNvPr id="6" name="본문"/>
           <p:cNvSpPr txBox="1"/>
           <p:nvPr/>
         </p:nvSpPr>
@@ -4867,7 +3868,7 @@
       </p:sp>
       <p:sp>
         <p:nvSpPr>
-          <p:cNvPr id="18" name="쪽 번호"/>
+          <p:cNvPr id="7" name="쪽 번호"/>
           <p:cNvSpPr txBox="1"/>
           <p:nvPr/>
         </p:nvSpPr>
@@ -4989,325 +3990,6 @@
       </p:sp>
       <p:sp>
         <p:nvSpPr>
-          <p:cNvPr id="5" name="장식"/>
-          <p:cNvSpPr/>
-          <p:nvPr/>
-        </p:nvSpPr>
-        <p:spPr>
-          <a:xfrm>
-            <a:off x="5568434" y="434860"/>
-            <a:ext cx="153549" cy="153549"/>
-          </a:xfrm>
-          <a:prstGeom prst="ellipse">
-            <a:avLst/>
-          </a:prstGeom>
-          <a:solidFill>
-            <a:srgbClr val="8C56B3"/>
-          </a:solidFill>
-          <a:ln>
-            <a:noFill/>
-          </a:ln>
-        </p:spPr>
-        <p:txBody>
-          <a:bodyPr rtlCol="0" anchor="ctr"/>
-          <a:lstStyle/>
-          <a:p>
-            <a:pPr algn="ctr"/>
-          </a:p>
-        </p:txBody>
-      </p:sp>
-      <p:sp>
-        <p:nvSpPr>
-          <p:cNvPr id="6" name="장식"/>
-          <p:cNvSpPr/>
-          <p:nvPr/>
-        </p:nvSpPr>
-        <p:spPr>
-          <a:xfrm>
-            <a:off x="6030113" y="1127246"/>
-            <a:ext cx="113682" cy="113682"/>
-          </a:xfrm>
-          <a:prstGeom prst="ellipse">
-            <a:avLst/>
-          </a:prstGeom>
-          <a:solidFill>
-            <a:srgbClr val="E3D3EE"/>
-          </a:solidFill>
-          <a:ln>
-            <a:noFill/>
-          </a:ln>
-        </p:spPr>
-        <p:txBody>
-          <a:bodyPr rtlCol="0" anchor="ctr"/>
-          <a:lstStyle/>
-          <a:p>
-            <a:pPr algn="ctr"/>
-          </a:p>
-        </p:txBody>
-      </p:sp>
-      <p:sp>
-        <p:nvSpPr>
-          <p:cNvPr id="7" name="장식"/>
-          <p:cNvSpPr/>
-          <p:nvPr/>
-        </p:nvSpPr>
-        <p:spPr>
-          <a:xfrm>
-            <a:off x="6235002" y="497270"/>
-            <a:ext cx="149756" cy="149756"/>
-          </a:xfrm>
-          <a:prstGeom prst="ellipse">
-            <a:avLst/>
-          </a:prstGeom>
-          <a:solidFill>
-            <a:srgbClr val="868D3F"/>
-          </a:solidFill>
-          <a:ln>
-            <a:noFill/>
-          </a:ln>
-        </p:spPr>
-        <p:txBody>
-          <a:bodyPr rtlCol="0" anchor="ctr"/>
-          <a:lstStyle/>
-          <a:p>
-            <a:pPr algn="ctr"/>
-          </a:p>
-        </p:txBody>
-      </p:sp>
-      <p:sp>
-        <p:nvSpPr>
-          <p:cNvPr id="8" name="장식"/>
-          <p:cNvSpPr/>
-          <p:nvPr/>
-        </p:nvSpPr>
-        <p:spPr>
-          <a:xfrm>
-            <a:off x="6189948" y="1096027"/>
-            <a:ext cx="134066" cy="134066"/>
-          </a:xfrm>
-          <a:prstGeom prst="ellipse">
-            <a:avLst/>
-          </a:prstGeom>
-          <a:solidFill>
-            <a:srgbClr val="8C56B3"/>
-          </a:solidFill>
-          <a:ln>
-            <a:noFill/>
-          </a:ln>
-        </p:spPr>
-        <p:txBody>
-          <a:bodyPr rtlCol="0" anchor="ctr"/>
-          <a:lstStyle/>
-          <a:p>
-            <a:pPr algn="ctr"/>
-          </a:p>
-        </p:txBody>
-      </p:sp>
-      <p:sp>
-        <p:nvSpPr>
-          <p:cNvPr id="9" name="장식"/>
-          <p:cNvSpPr/>
-          <p:nvPr/>
-        </p:nvSpPr>
-        <p:spPr>
-          <a:xfrm>
-            <a:off x="5721083" y="332121"/>
-            <a:ext cx="94724" cy="94724"/>
-          </a:xfrm>
-          <a:prstGeom prst="ellipse">
-            <a:avLst/>
-          </a:prstGeom>
-          <a:solidFill>
-            <a:srgbClr val="E3D3EE"/>
-          </a:solidFill>
-          <a:ln>
-            <a:noFill/>
-          </a:ln>
-        </p:spPr>
-        <p:txBody>
-          <a:bodyPr rtlCol="0" anchor="ctr"/>
-          <a:lstStyle/>
-          <a:p>
-            <a:pPr algn="ctr"/>
-          </a:p>
-        </p:txBody>
-      </p:sp>
-      <p:sp>
-        <p:nvSpPr>
-          <p:cNvPr id="10" name="장식"/>
-          <p:cNvSpPr/>
-          <p:nvPr/>
-        </p:nvSpPr>
-        <p:spPr>
-          <a:xfrm>
-            <a:off x="6094529" y="351933"/>
-            <a:ext cx="102698" cy="102698"/>
-          </a:xfrm>
-          <a:prstGeom prst="ellipse">
-            <a:avLst/>
-          </a:prstGeom>
-          <a:solidFill>
-            <a:srgbClr val="868D3F"/>
-          </a:solidFill>
-          <a:ln>
-            <a:noFill/>
-          </a:ln>
-        </p:spPr>
-        <p:txBody>
-          <a:bodyPr rtlCol="0" anchor="ctr"/>
-          <a:lstStyle/>
-          <a:p>
-            <a:pPr algn="ctr"/>
-          </a:p>
-        </p:txBody>
-      </p:sp>
-      <p:sp>
-        <p:nvSpPr>
-          <p:cNvPr id="11" name="장식"/>
-          <p:cNvSpPr/>
-          <p:nvPr/>
-        </p:nvSpPr>
-        <p:spPr>
-          <a:xfrm>
-            <a:off x="6263753" y="1195815"/>
-            <a:ext cx="177042" cy="177042"/>
-          </a:xfrm>
-          <a:prstGeom prst="ellipse">
-            <a:avLst/>
-          </a:prstGeom>
-          <a:solidFill>
-            <a:srgbClr val="8C56B3"/>
-          </a:solidFill>
-          <a:ln>
-            <a:noFill/>
-          </a:ln>
-        </p:spPr>
-        <p:txBody>
-          <a:bodyPr rtlCol="0" anchor="ctr"/>
-          <a:lstStyle/>
-          <a:p>
-            <a:pPr algn="ctr"/>
-          </a:p>
-        </p:txBody>
-      </p:sp>
-      <p:sp>
-        <p:nvSpPr>
-          <p:cNvPr id="12" name="장식"/>
-          <p:cNvSpPr/>
-          <p:nvPr/>
-        </p:nvSpPr>
-        <p:spPr>
-          <a:xfrm>
-            <a:off x="5975813" y="479409"/>
-            <a:ext cx="170008" cy="170008"/>
-          </a:xfrm>
-          <a:prstGeom prst="ellipse">
-            <a:avLst/>
-          </a:prstGeom>
-          <a:solidFill>
-            <a:srgbClr val="E3D3EE"/>
-          </a:solidFill>
-          <a:ln>
-            <a:noFill/>
-          </a:ln>
-        </p:spPr>
-        <p:txBody>
-          <a:bodyPr rtlCol="0" anchor="ctr"/>
-          <a:lstStyle/>
-          <a:p>
-            <a:pPr algn="ctr"/>
-          </a:p>
-        </p:txBody>
-      </p:sp>
-      <p:sp>
-        <p:nvSpPr>
-          <p:cNvPr id="13" name="장식"/>
-          <p:cNvSpPr/>
-          <p:nvPr/>
-        </p:nvSpPr>
-        <p:spPr>
-          <a:xfrm>
-            <a:off x="5759000" y="457650"/>
-            <a:ext cx="173296" cy="173296"/>
-          </a:xfrm>
-          <a:prstGeom prst="ellipse">
-            <a:avLst/>
-          </a:prstGeom>
-          <a:solidFill>
-            <a:srgbClr val="868D3F"/>
-          </a:solidFill>
-          <a:ln>
-            <a:noFill/>
-          </a:ln>
-        </p:spPr>
-        <p:txBody>
-          <a:bodyPr rtlCol="0" anchor="ctr"/>
-          <a:lstStyle/>
-          <a:p>
-            <a:pPr algn="ctr"/>
-          </a:p>
-        </p:txBody>
-      </p:sp>
-      <p:sp>
-        <p:nvSpPr>
-          <p:cNvPr id="14" name="장식"/>
-          <p:cNvSpPr/>
-          <p:nvPr/>
-        </p:nvSpPr>
-        <p:spPr>
-          <a:xfrm>
-            <a:off x="5469048" y="209851"/>
-            <a:ext cx="141496" cy="141496"/>
-          </a:xfrm>
-          <a:prstGeom prst="ellipse">
-            <a:avLst/>
-          </a:prstGeom>
-          <a:solidFill>
-            <a:srgbClr val="8C56B3"/>
-          </a:solidFill>
-          <a:ln>
-            <a:noFill/>
-          </a:ln>
-        </p:spPr>
-        <p:txBody>
-          <a:bodyPr rtlCol="0" anchor="ctr"/>
-          <a:lstStyle/>
-          <a:p>
-            <a:pPr algn="ctr"/>
-          </a:p>
-        </p:txBody>
-      </p:sp>
-      <p:sp>
-        <p:nvSpPr>
-          <p:cNvPr id="15" name="장식"/>
-          <p:cNvSpPr/>
-          <p:nvPr/>
-        </p:nvSpPr>
-        <p:spPr>
-          <a:xfrm>
-            <a:off x="6268892" y="1201606"/>
-            <a:ext cx="84341" cy="84341"/>
-          </a:xfrm>
-          <a:prstGeom prst="ellipse">
-            <a:avLst/>
-          </a:prstGeom>
-          <a:solidFill>
-            <a:srgbClr val="E3D3EE"/>
-          </a:solidFill>
-          <a:ln>
-            <a:noFill/>
-          </a:ln>
-        </p:spPr>
-        <p:txBody>
-          <a:bodyPr rtlCol="0" anchor="ctr"/>
-          <a:lstStyle/>
-          <a:p>
-            <a:pPr algn="ctr"/>
-          </a:p>
-        </p:txBody>
-      </p:sp>
-      <p:sp>
-        <p:nvSpPr>
           <p:cNvPr id="2" name="Title 1"/>
           <p:cNvSpPr>
             <a:spLocks noGrp="1"/>
@@ -5346,7 +4028,7 @@
       </p:sp>
       <p:sp>
         <p:nvSpPr>
-          <p:cNvPr id="16" name="번호"/>
+          <p:cNvPr id="5" name="번호"/>
           <p:cNvSpPr txBox="1"/>
           <p:nvPr/>
         </p:nvSpPr>
@@ -5384,7 +4066,7 @@
       </p:sp>
       <p:sp>
         <p:nvSpPr>
-          <p:cNvPr id="17" name="본문"/>
+          <p:cNvPr id="6" name="본문"/>
           <p:cNvSpPr txBox="1"/>
           <p:nvPr/>
         </p:nvSpPr>
@@ -5422,7 +4104,7 @@
       </p:sp>
       <p:sp>
         <p:nvSpPr>
-          <p:cNvPr id="18" name="쪽 번호"/>
+          <p:cNvPr id="7" name="쪽 번호"/>
           <p:cNvSpPr txBox="1"/>
           <p:nvPr/>
         </p:nvSpPr>
@@ -5544,325 +4226,6 @@
       </p:sp>
       <p:sp>
         <p:nvSpPr>
-          <p:cNvPr id="5" name="장식"/>
-          <p:cNvSpPr/>
-          <p:nvPr/>
-        </p:nvSpPr>
-        <p:spPr>
-          <a:xfrm>
-            <a:off x="5568434" y="434860"/>
-            <a:ext cx="153549" cy="153549"/>
-          </a:xfrm>
-          <a:prstGeom prst="ellipse">
-            <a:avLst/>
-          </a:prstGeom>
-          <a:solidFill>
-            <a:srgbClr val="8C56B3"/>
-          </a:solidFill>
-          <a:ln>
-            <a:noFill/>
-          </a:ln>
-        </p:spPr>
-        <p:txBody>
-          <a:bodyPr rtlCol="0" anchor="ctr"/>
-          <a:lstStyle/>
-          <a:p>
-            <a:pPr algn="ctr"/>
-          </a:p>
-        </p:txBody>
-      </p:sp>
-      <p:sp>
-        <p:nvSpPr>
-          <p:cNvPr id="6" name="장식"/>
-          <p:cNvSpPr/>
-          <p:nvPr/>
-        </p:nvSpPr>
-        <p:spPr>
-          <a:xfrm>
-            <a:off x="6030113" y="1127246"/>
-            <a:ext cx="113682" cy="113682"/>
-          </a:xfrm>
-          <a:prstGeom prst="ellipse">
-            <a:avLst/>
-          </a:prstGeom>
-          <a:solidFill>
-            <a:srgbClr val="E3D3EE"/>
-          </a:solidFill>
-          <a:ln>
-            <a:noFill/>
-          </a:ln>
-        </p:spPr>
-        <p:txBody>
-          <a:bodyPr rtlCol="0" anchor="ctr"/>
-          <a:lstStyle/>
-          <a:p>
-            <a:pPr algn="ctr"/>
-          </a:p>
-        </p:txBody>
-      </p:sp>
-      <p:sp>
-        <p:nvSpPr>
-          <p:cNvPr id="7" name="장식"/>
-          <p:cNvSpPr/>
-          <p:nvPr/>
-        </p:nvSpPr>
-        <p:spPr>
-          <a:xfrm>
-            <a:off x="6235002" y="497270"/>
-            <a:ext cx="149756" cy="149756"/>
-          </a:xfrm>
-          <a:prstGeom prst="ellipse">
-            <a:avLst/>
-          </a:prstGeom>
-          <a:solidFill>
-            <a:srgbClr val="868D3F"/>
-          </a:solidFill>
-          <a:ln>
-            <a:noFill/>
-          </a:ln>
-        </p:spPr>
-        <p:txBody>
-          <a:bodyPr rtlCol="0" anchor="ctr"/>
-          <a:lstStyle/>
-          <a:p>
-            <a:pPr algn="ctr"/>
-          </a:p>
-        </p:txBody>
-      </p:sp>
-      <p:sp>
-        <p:nvSpPr>
-          <p:cNvPr id="8" name="장식"/>
-          <p:cNvSpPr/>
-          <p:nvPr/>
-        </p:nvSpPr>
-        <p:spPr>
-          <a:xfrm>
-            <a:off x="6189948" y="1096027"/>
-            <a:ext cx="134066" cy="134066"/>
-          </a:xfrm>
-          <a:prstGeom prst="ellipse">
-            <a:avLst/>
-          </a:prstGeom>
-          <a:solidFill>
-            <a:srgbClr val="8C56B3"/>
-          </a:solidFill>
-          <a:ln>
-            <a:noFill/>
-          </a:ln>
-        </p:spPr>
-        <p:txBody>
-          <a:bodyPr rtlCol="0" anchor="ctr"/>
-          <a:lstStyle/>
-          <a:p>
-            <a:pPr algn="ctr"/>
-          </a:p>
-        </p:txBody>
-      </p:sp>
-      <p:sp>
-        <p:nvSpPr>
-          <p:cNvPr id="9" name="장식"/>
-          <p:cNvSpPr/>
-          <p:nvPr/>
-        </p:nvSpPr>
-        <p:spPr>
-          <a:xfrm>
-            <a:off x="5721083" y="332121"/>
-            <a:ext cx="94724" cy="94724"/>
-          </a:xfrm>
-          <a:prstGeom prst="ellipse">
-            <a:avLst/>
-          </a:prstGeom>
-          <a:solidFill>
-            <a:srgbClr val="E3D3EE"/>
-          </a:solidFill>
-          <a:ln>
-            <a:noFill/>
-          </a:ln>
-        </p:spPr>
-        <p:txBody>
-          <a:bodyPr rtlCol="0" anchor="ctr"/>
-          <a:lstStyle/>
-          <a:p>
-            <a:pPr algn="ctr"/>
-          </a:p>
-        </p:txBody>
-      </p:sp>
-      <p:sp>
-        <p:nvSpPr>
-          <p:cNvPr id="10" name="장식"/>
-          <p:cNvSpPr/>
-          <p:nvPr/>
-        </p:nvSpPr>
-        <p:spPr>
-          <a:xfrm>
-            <a:off x="6094529" y="351933"/>
-            <a:ext cx="102698" cy="102698"/>
-          </a:xfrm>
-          <a:prstGeom prst="ellipse">
-            <a:avLst/>
-          </a:prstGeom>
-          <a:solidFill>
-            <a:srgbClr val="868D3F"/>
-          </a:solidFill>
-          <a:ln>
-            <a:noFill/>
-          </a:ln>
-        </p:spPr>
-        <p:txBody>
-          <a:bodyPr rtlCol="0" anchor="ctr"/>
-          <a:lstStyle/>
-          <a:p>
-            <a:pPr algn="ctr"/>
-          </a:p>
-        </p:txBody>
-      </p:sp>
-      <p:sp>
-        <p:nvSpPr>
-          <p:cNvPr id="11" name="장식"/>
-          <p:cNvSpPr/>
-          <p:nvPr/>
-        </p:nvSpPr>
-        <p:spPr>
-          <a:xfrm>
-            <a:off x="6263753" y="1195815"/>
-            <a:ext cx="177042" cy="177042"/>
-          </a:xfrm>
-          <a:prstGeom prst="ellipse">
-            <a:avLst/>
-          </a:prstGeom>
-          <a:solidFill>
-            <a:srgbClr val="8C56B3"/>
-          </a:solidFill>
-          <a:ln>
-            <a:noFill/>
-          </a:ln>
-        </p:spPr>
-        <p:txBody>
-          <a:bodyPr rtlCol="0" anchor="ctr"/>
-          <a:lstStyle/>
-          <a:p>
-            <a:pPr algn="ctr"/>
-          </a:p>
-        </p:txBody>
-      </p:sp>
-      <p:sp>
-        <p:nvSpPr>
-          <p:cNvPr id="12" name="장식"/>
-          <p:cNvSpPr/>
-          <p:nvPr/>
-        </p:nvSpPr>
-        <p:spPr>
-          <a:xfrm>
-            <a:off x="5975813" y="479409"/>
-            <a:ext cx="170008" cy="170008"/>
-          </a:xfrm>
-          <a:prstGeom prst="ellipse">
-            <a:avLst/>
-          </a:prstGeom>
-          <a:solidFill>
-            <a:srgbClr val="E3D3EE"/>
-          </a:solidFill>
-          <a:ln>
-            <a:noFill/>
-          </a:ln>
-        </p:spPr>
-        <p:txBody>
-          <a:bodyPr rtlCol="0" anchor="ctr"/>
-          <a:lstStyle/>
-          <a:p>
-            <a:pPr algn="ctr"/>
-          </a:p>
-        </p:txBody>
-      </p:sp>
-      <p:sp>
-        <p:nvSpPr>
-          <p:cNvPr id="13" name="장식"/>
-          <p:cNvSpPr/>
-          <p:nvPr/>
-        </p:nvSpPr>
-        <p:spPr>
-          <a:xfrm>
-            <a:off x="5759000" y="457650"/>
-            <a:ext cx="173296" cy="173296"/>
-          </a:xfrm>
-          <a:prstGeom prst="ellipse">
-            <a:avLst/>
-          </a:prstGeom>
-          <a:solidFill>
-            <a:srgbClr val="868D3F"/>
-          </a:solidFill>
-          <a:ln>
-            <a:noFill/>
-          </a:ln>
-        </p:spPr>
-        <p:txBody>
-          <a:bodyPr rtlCol="0" anchor="ctr"/>
-          <a:lstStyle/>
-          <a:p>
-            <a:pPr algn="ctr"/>
-          </a:p>
-        </p:txBody>
-      </p:sp>
-      <p:sp>
-        <p:nvSpPr>
-          <p:cNvPr id="14" name="장식"/>
-          <p:cNvSpPr/>
-          <p:nvPr/>
-        </p:nvSpPr>
-        <p:spPr>
-          <a:xfrm>
-            <a:off x="5469048" y="209851"/>
-            <a:ext cx="141496" cy="141496"/>
-          </a:xfrm>
-          <a:prstGeom prst="ellipse">
-            <a:avLst/>
-          </a:prstGeom>
-          <a:solidFill>
-            <a:srgbClr val="8C56B3"/>
-          </a:solidFill>
-          <a:ln>
-            <a:noFill/>
-          </a:ln>
-        </p:spPr>
-        <p:txBody>
-          <a:bodyPr rtlCol="0" anchor="ctr"/>
-          <a:lstStyle/>
-          <a:p>
-            <a:pPr algn="ctr"/>
-          </a:p>
-        </p:txBody>
-      </p:sp>
-      <p:sp>
-        <p:nvSpPr>
-          <p:cNvPr id="15" name="장식"/>
-          <p:cNvSpPr/>
-          <p:nvPr/>
-        </p:nvSpPr>
-        <p:spPr>
-          <a:xfrm>
-            <a:off x="6268892" y="1201606"/>
-            <a:ext cx="84341" cy="84341"/>
-          </a:xfrm>
-          <a:prstGeom prst="ellipse">
-            <a:avLst/>
-          </a:prstGeom>
-          <a:solidFill>
-            <a:srgbClr val="E3D3EE"/>
-          </a:solidFill>
-          <a:ln>
-            <a:noFill/>
-          </a:ln>
-        </p:spPr>
-        <p:txBody>
-          <a:bodyPr rtlCol="0" anchor="ctr"/>
-          <a:lstStyle/>
-          <a:p>
-            <a:pPr algn="ctr"/>
-          </a:p>
-        </p:txBody>
-      </p:sp>
-      <p:sp>
-        <p:nvSpPr>
           <p:cNvPr id="2" name="Title 1"/>
           <p:cNvSpPr>
             <a:spLocks noGrp="1"/>
@@ -5901,7 +4264,7 @@
       </p:sp>
       <p:sp>
         <p:nvSpPr>
-          <p:cNvPr id="16" name="번호"/>
+          <p:cNvPr id="5" name="번호"/>
           <p:cNvSpPr txBox="1"/>
           <p:nvPr/>
         </p:nvSpPr>
@@ -5939,7 +4302,7 @@
       </p:sp>
       <p:sp>
         <p:nvSpPr>
-          <p:cNvPr id="17" name="본문"/>
+          <p:cNvPr id="6" name="본문"/>
           <p:cNvSpPr txBox="1"/>
           <p:nvPr/>
         </p:nvSpPr>
@@ -5977,7 +4340,7 @@
       </p:sp>
       <p:sp>
         <p:nvSpPr>
-          <p:cNvPr id="18" name="쪽 번호"/>
+          <p:cNvPr id="7" name="쪽 번호"/>
           <p:cNvSpPr txBox="1"/>
           <p:nvPr/>
         </p:nvSpPr>
@@ -6099,325 +4462,6 @@
       </p:sp>
       <p:sp>
         <p:nvSpPr>
-          <p:cNvPr id="5" name="장식"/>
-          <p:cNvSpPr/>
-          <p:nvPr/>
-        </p:nvSpPr>
-        <p:spPr>
-          <a:xfrm>
-            <a:off x="5568434" y="434860"/>
-            <a:ext cx="153549" cy="153549"/>
-          </a:xfrm>
-          <a:prstGeom prst="ellipse">
-            <a:avLst/>
-          </a:prstGeom>
-          <a:solidFill>
-            <a:srgbClr val="8C56B3"/>
-          </a:solidFill>
-          <a:ln>
-            <a:noFill/>
-          </a:ln>
-        </p:spPr>
-        <p:txBody>
-          <a:bodyPr rtlCol="0" anchor="ctr"/>
-          <a:lstStyle/>
-          <a:p>
-            <a:pPr algn="ctr"/>
-          </a:p>
-        </p:txBody>
-      </p:sp>
-      <p:sp>
-        <p:nvSpPr>
-          <p:cNvPr id="6" name="장식"/>
-          <p:cNvSpPr/>
-          <p:nvPr/>
-        </p:nvSpPr>
-        <p:spPr>
-          <a:xfrm>
-            <a:off x="6030113" y="1127246"/>
-            <a:ext cx="113682" cy="113682"/>
-          </a:xfrm>
-          <a:prstGeom prst="ellipse">
-            <a:avLst/>
-          </a:prstGeom>
-          <a:solidFill>
-            <a:srgbClr val="E3D3EE"/>
-          </a:solidFill>
-          <a:ln>
-            <a:noFill/>
-          </a:ln>
-        </p:spPr>
-        <p:txBody>
-          <a:bodyPr rtlCol="0" anchor="ctr"/>
-          <a:lstStyle/>
-          <a:p>
-            <a:pPr algn="ctr"/>
-          </a:p>
-        </p:txBody>
-      </p:sp>
-      <p:sp>
-        <p:nvSpPr>
-          <p:cNvPr id="7" name="장식"/>
-          <p:cNvSpPr/>
-          <p:nvPr/>
-        </p:nvSpPr>
-        <p:spPr>
-          <a:xfrm>
-            <a:off x="6235002" y="497270"/>
-            <a:ext cx="149756" cy="149756"/>
-          </a:xfrm>
-          <a:prstGeom prst="ellipse">
-            <a:avLst/>
-          </a:prstGeom>
-          <a:solidFill>
-            <a:srgbClr val="868D3F"/>
-          </a:solidFill>
-          <a:ln>
-            <a:noFill/>
-          </a:ln>
-        </p:spPr>
-        <p:txBody>
-          <a:bodyPr rtlCol="0" anchor="ctr"/>
-          <a:lstStyle/>
-          <a:p>
-            <a:pPr algn="ctr"/>
-          </a:p>
-        </p:txBody>
-      </p:sp>
-      <p:sp>
-        <p:nvSpPr>
-          <p:cNvPr id="8" name="장식"/>
-          <p:cNvSpPr/>
-          <p:nvPr/>
-        </p:nvSpPr>
-        <p:spPr>
-          <a:xfrm>
-            <a:off x="6189948" y="1096027"/>
-            <a:ext cx="134066" cy="134066"/>
-          </a:xfrm>
-          <a:prstGeom prst="ellipse">
-            <a:avLst/>
-          </a:prstGeom>
-          <a:solidFill>
-            <a:srgbClr val="8C56B3"/>
-          </a:solidFill>
-          <a:ln>
-            <a:noFill/>
-          </a:ln>
-        </p:spPr>
-        <p:txBody>
-          <a:bodyPr rtlCol="0" anchor="ctr"/>
-          <a:lstStyle/>
-          <a:p>
-            <a:pPr algn="ctr"/>
-          </a:p>
-        </p:txBody>
-      </p:sp>
-      <p:sp>
-        <p:nvSpPr>
-          <p:cNvPr id="9" name="장식"/>
-          <p:cNvSpPr/>
-          <p:nvPr/>
-        </p:nvSpPr>
-        <p:spPr>
-          <a:xfrm>
-            <a:off x="5721083" y="332121"/>
-            <a:ext cx="94724" cy="94724"/>
-          </a:xfrm>
-          <a:prstGeom prst="ellipse">
-            <a:avLst/>
-          </a:prstGeom>
-          <a:solidFill>
-            <a:srgbClr val="E3D3EE"/>
-          </a:solidFill>
-          <a:ln>
-            <a:noFill/>
-          </a:ln>
-        </p:spPr>
-        <p:txBody>
-          <a:bodyPr rtlCol="0" anchor="ctr"/>
-          <a:lstStyle/>
-          <a:p>
-            <a:pPr algn="ctr"/>
-          </a:p>
-        </p:txBody>
-      </p:sp>
-      <p:sp>
-        <p:nvSpPr>
-          <p:cNvPr id="10" name="장식"/>
-          <p:cNvSpPr/>
-          <p:nvPr/>
-        </p:nvSpPr>
-        <p:spPr>
-          <a:xfrm>
-            <a:off x="6094529" y="351933"/>
-            <a:ext cx="102698" cy="102698"/>
-          </a:xfrm>
-          <a:prstGeom prst="ellipse">
-            <a:avLst/>
-          </a:prstGeom>
-          <a:solidFill>
-            <a:srgbClr val="868D3F"/>
-          </a:solidFill>
-          <a:ln>
-            <a:noFill/>
-          </a:ln>
-        </p:spPr>
-        <p:txBody>
-          <a:bodyPr rtlCol="0" anchor="ctr"/>
-          <a:lstStyle/>
-          <a:p>
-            <a:pPr algn="ctr"/>
-          </a:p>
-        </p:txBody>
-      </p:sp>
-      <p:sp>
-        <p:nvSpPr>
-          <p:cNvPr id="11" name="장식"/>
-          <p:cNvSpPr/>
-          <p:nvPr/>
-        </p:nvSpPr>
-        <p:spPr>
-          <a:xfrm>
-            <a:off x="6263753" y="1195815"/>
-            <a:ext cx="177042" cy="177042"/>
-          </a:xfrm>
-          <a:prstGeom prst="ellipse">
-            <a:avLst/>
-          </a:prstGeom>
-          <a:solidFill>
-            <a:srgbClr val="8C56B3"/>
-          </a:solidFill>
-          <a:ln>
-            <a:noFill/>
-          </a:ln>
-        </p:spPr>
-        <p:txBody>
-          <a:bodyPr rtlCol="0" anchor="ctr"/>
-          <a:lstStyle/>
-          <a:p>
-            <a:pPr algn="ctr"/>
-          </a:p>
-        </p:txBody>
-      </p:sp>
-      <p:sp>
-        <p:nvSpPr>
-          <p:cNvPr id="12" name="장식"/>
-          <p:cNvSpPr/>
-          <p:nvPr/>
-        </p:nvSpPr>
-        <p:spPr>
-          <a:xfrm>
-            <a:off x="5975813" y="479409"/>
-            <a:ext cx="170008" cy="170008"/>
-          </a:xfrm>
-          <a:prstGeom prst="ellipse">
-            <a:avLst/>
-          </a:prstGeom>
-          <a:solidFill>
-            <a:srgbClr val="E3D3EE"/>
-          </a:solidFill>
-          <a:ln>
-            <a:noFill/>
-          </a:ln>
-        </p:spPr>
-        <p:txBody>
-          <a:bodyPr rtlCol="0" anchor="ctr"/>
-          <a:lstStyle/>
-          <a:p>
-            <a:pPr algn="ctr"/>
-          </a:p>
-        </p:txBody>
-      </p:sp>
-      <p:sp>
-        <p:nvSpPr>
-          <p:cNvPr id="13" name="장식"/>
-          <p:cNvSpPr/>
-          <p:nvPr/>
-        </p:nvSpPr>
-        <p:spPr>
-          <a:xfrm>
-            <a:off x="5759000" y="457650"/>
-            <a:ext cx="173296" cy="173296"/>
-          </a:xfrm>
-          <a:prstGeom prst="ellipse">
-            <a:avLst/>
-          </a:prstGeom>
-          <a:solidFill>
-            <a:srgbClr val="868D3F"/>
-          </a:solidFill>
-          <a:ln>
-            <a:noFill/>
-          </a:ln>
-        </p:spPr>
-        <p:txBody>
-          <a:bodyPr rtlCol="0" anchor="ctr"/>
-          <a:lstStyle/>
-          <a:p>
-            <a:pPr algn="ctr"/>
-          </a:p>
-        </p:txBody>
-      </p:sp>
-      <p:sp>
-        <p:nvSpPr>
-          <p:cNvPr id="14" name="장식"/>
-          <p:cNvSpPr/>
-          <p:nvPr/>
-        </p:nvSpPr>
-        <p:spPr>
-          <a:xfrm>
-            <a:off x="5469048" y="209851"/>
-            <a:ext cx="141496" cy="141496"/>
-          </a:xfrm>
-          <a:prstGeom prst="ellipse">
-            <a:avLst/>
-          </a:prstGeom>
-          <a:solidFill>
-            <a:srgbClr val="8C56B3"/>
-          </a:solidFill>
-          <a:ln>
-            <a:noFill/>
-          </a:ln>
-        </p:spPr>
-        <p:txBody>
-          <a:bodyPr rtlCol="0" anchor="ctr"/>
-          <a:lstStyle/>
-          <a:p>
-            <a:pPr algn="ctr"/>
-          </a:p>
-        </p:txBody>
-      </p:sp>
-      <p:sp>
-        <p:nvSpPr>
-          <p:cNvPr id="15" name="장식"/>
-          <p:cNvSpPr/>
-          <p:nvPr/>
-        </p:nvSpPr>
-        <p:spPr>
-          <a:xfrm>
-            <a:off x="6268892" y="1201606"/>
-            <a:ext cx="84341" cy="84341"/>
-          </a:xfrm>
-          <a:prstGeom prst="ellipse">
-            <a:avLst/>
-          </a:prstGeom>
-          <a:solidFill>
-            <a:srgbClr val="E3D3EE"/>
-          </a:solidFill>
-          <a:ln>
-            <a:noFill/>
-          </a:ln>
-        </p:spPr>
-        <p:txBody>
-          <a:bodyPr rtlCol="0" anchor="ctr"/>
-          <a:lstStyle/>
-          <a:p>
-            <a:pPr algn="ctr"/>
-          </a:p>
-        </p:txBody>
-      </p:sp>
-      <p:sp>
-        <p:nvSpPr>
           <p:cNvPr id="2" name="Title 1"/>
           <p:cNvSpPr>
             <a:spLocks noGrp="1"/>
@@ -6456,7 +4500,7 @@
       </p:sp>
       <p:sp>
         <p:nvSpPr>
-          <p:cNvPr id="16" name="번호"/>
+          <p:cNvPr id="5" name="번호"/>
           <p:cNvSpPr txBox="1"/>
           <p:nvPr/>
         </p:nvSpPr>
@@ -6494,7 +4538,7 @@
       </p:sp>
       <p:sp>
         <p:nvSpPr>
-          <p:cNvPr id="17" name="본문"/>
+          <p:cNvPr id="6" name="본문"/>
           <p:cNvSpPr txBox="1"/>
           <p:nvPr/>
         </p:nvSpPr>
@@ -6532,7 +4576,7 @@
       </p:sp>
       <p:sp>
         <p:nvSpPr>
-          <p:cNvPr id="18" name="쪽 번호"/>
+          <p:cNvPr id="7" name="쪽 번호"/>
           <p:cNvSpPr txBox="1"/>
           <p:nvPr/>
         </p:nvSpPr>
@@ -6579,14 +4623,6 @@
 <file path=ppt/slides/slide7.xml><?xml version="1.0" encoding="utf-8"?>
 <p:sld xmlns:a="http://schemas.openxmlformats.org/drawingml/2006/main" xmlns:p="http://schemas.openxmlformats.org/presentationml/2006/main" xmlns:r="http://schemas.openxmlformats.org/officeDocument/2006/relationships">
   <p:cSld>
-    <p:bg>
-      <p:bgPr>
-        <a:solidFill>
-          <a:srgbClr val="FFFFFF"/>
-        </a:solidFill>
-        <a:effectLst/>
-      </p:bgPr>
-    </p:bg>
     <p:spTree>
       <p:nvGrpSpPr>
         <p:cNvPr id="1" name=""/>
@@ -6594,383 +4630,30 @@
         <p:nvPr/>
       </p:nvGrpSpPr>
       <p:grpSpPr/>
-      <p:sp>
-        <p:nvSpPr>
-          <p:cNvPr id="3" name="장식"/>
-          <p:cNvSpPr/>
+      <p:pic>
+        <p:nvPicPr>
+          <p:cNvPr id="3" name="표지 그림" descr="news-11.jpg"/>
+          <p:cNvPicPr>
+            <a:picLocks noChangeAspect="1"/>
+          </p:cNvPicPr>
           <p:nvPr/>
-        </p:nvSpPr>
-        <p:spPr>
-          <a:xfrm>
-            <a:off x="3977639" y="-1714500"/>
-            <a:ext cx="7886700" cy="7886700"/>
-          </a:xfrm>
-          <a:prstGeom prst="ellipse">
+        </p:nvPicPr>
+        <p:blipFill>
+          <a:blip r:embed="rId2"/>
+          <a:stretch>
+            <a:fillRect/>
+          </a:stretch>
+        </p:blipFill>
+        <p:spPr>
+          <a:xfrm>
+            <a:off x="0" y="0"/>
+            <a:ext cx="6858000" cy="6858000"/>
+          </a:xfrm>
+          <a:prstGeom prst="rect">
             <a:avLst/>
           </a:prstGeom>
-          <a:solidFill>
-            <a:srgbClr val="E3D3EE"/>
-          </a:solidFill>
-          <a:ln>
-            <a:noFill/>
-          </a:ln>
-        </p:spPr>
-        <p:txBody>
-          <a:bodyPr rtlCol="0" anchor="ctr"/>
-          <a:lstStyle/>
-          <a:p>
-            <a:pPr algn="ctr"/>
-          </a:p>
-        </p:txBody>
-      </p:sp>
-      <p:sp>
-        <p:nvSpPr>
-          <p:cNvPr id="4" name="장식"/>
-          <p:cNvSpPr/>
-          <p:nvPr/>
-        </p:nvSpPr>
-        <p:spPr>
-          <a:xfrm>
-            <a:off x="5349240" y="3977639"/>
-            <a:ext cx="3429000" cy="3429000"/>
-          </a:xfrm>
-          <a:prstGeom prst="ellipse">
-            <a:avLst/>
-          </a:prstGeom>
-          <a:solidFill>
-            <a:srgbClr val="8C56B3"/>
-          </a:solidFill>
-          <a:ln>
-            <a:noFill/>
-          </a:ln>
-        </p:spPr>
-        <p:txBody>
-          <a:bodyPr rtlCol="0" anchor="ctr"/>
-          <a:lstStyle/>
-          <a:p>
-            <a:pPr algn="ctr"/>
-          </a:p>
-        </p:txBody>
-      </p:sp>
-      <p:sp>
-        <p:nvSpPr>
-          <p:cNvPr id="5" name="장식"/>
-          <p:cNvSpPr/>
-          <p:nvPr/>
-        </p:nvSpPr>
-        <p:spPr>
-          <a:xfrm>
-            <a:off x="4281138" y="665468"/>
-            <a:ext cx="439711" cy="439711"/>
-          </a:xfrm>
-          <a:prstGeom prst="ellipse">
-            <a:avLst/>
-          </a:prstGeom>
-          <a:solidFill>
-            <a:srgbClr val="8C56B3"/>
-          </a:solidFill>
-          <a:ln>
-            <a:noFill/>
-          </a:ln>
-        </p:spPr>
-        <p:txBody>
-          <a:bodyPr rtlCol="0" anchor="ctr"/>
-          <a:lstStyle/>
-          <a:p>
-            <a:pPr algn="ctr"/>
-          </a:p>
-        </p:txBody>
-      </p:sp>
-      <p:sp>
-        <p:nvSpPr>
-          <p:cNvPr id="6" name="장식"/>
-          <p:cNvSpPr/>
-          <p:nvPr/>
-        </p:nvSpPr>
-        <p:spPr>
-          <a:xfrm>
-            <a:off x="5603218" y="2648211"/>
-            <a:ext cx="325546" cy="325546"/>
-          </a:xfrm>
-          <a:prstGeom prst="ellipse">
-            <a:avLst/>
-          </a:prstGeom>
-          <a:solidFill>
-            <a:srgbClr val="E3D3EE"/>
-          </a:solidFill>
-          <a:ln>
-            <a:noFill/>
-          </a:ln>
-        </p:spPr>
-        <p:txBody>
-          <a:bodyPr rtlCol="0" anchor="ctr"/>
-          <a:lstStyle/>
-          <a:p>
-            <a:pPr algn="ctr"/>
-          </a:p>
-        </p:txBody>
-      </p:sp>
-      <p:sp>
-        <p:nvSpPr>
-          <p:cNvPr id="7" name="장식"/>
-          <p:cNvSpPr/>
-          <p:nvPr/>
-        </p:nvSpPr>
-        <p:spPr>
-          <a:xfrm>
-            <a:off x="6189946" y="844189"/>
-            <a:ext cx="428847" cy="428847"/>
-          </a:xfrm>
-          <a:prstGeom prst="ellipse">
-            <a:avLst/>
-          </a:prstGeom>
-          <a:solidFill>
-            <a:srgbClr val="868D3F"/>
-          </a:solidFill>
-          <a:ln>
-            <a:noFill/>
-          </a:ln>
-        </p:spPr>
-        <p:txBody>
-          <a:bodyPr rtlCol="0" anchor="ctr"/>
-          <a:lstStyle/>
-          <a:p>
-            <a:pPr algn="ctr"/>
-          </a:p>
-        </p:txBody>
-      </p:sp>
-      <p:sp>
-        <p:nvSpPr>
-          <p:cNvPr id="8" name="장식"/>
-          <p:cNvSpPr/>
-          <p:nvPr/>
-        </p:nvSpPr>
-        <p:spPr>
-          <a:xfrm>
-            <a:off x="6060927" y="2558810"/>
-            <a:ext cx="383917" cy="383917"/>
-          </a:xfrm>
-          <a:prstGeom prst="ellipse">
-            <a:avLst/>
-          </a:prstGeom>
-          <a:solidFill>
-            <a:srgbClr val="8C56B3"/>
-          </a:solidFill>
-          <a:ln>
-            <a:noFill/>
-          </a:ln>
-        </p:spPr>
-        <p:txBody>
-          <a:bodyPr rtlCol="0" anchor="ctr"/>
-          <a:lstStyle/>
-          <a:p>
-            <a:pPr algn="ctr"/>
-          </a:p>
-        </p:txBody>
-      </p:sp>
-      <p:sp>
-        <p:nvSpPr>
-          <p:cNvPr id="9" name="장식"/>
-          <p:cNvSpPr/>
-          <p:nvPr/>
-        </p:nvSpPr>
-        <p:spPr>
-          <a:xfrm>
-            <a:off x="4718267" y="371263"/>
-            <a:ext cx="271256" cy="271256"/>
-          </a:xfrm>
-          <a:prstGeom prst="ellipse">
-            <a:avLst/>
-          </a:prstGeom>
-          <a:solidFill>
-            <a:srgbClr val="E3D3EE"/>
-          </a:solidFill>
-          <a:ln>
-            <a:noFill/>
-          </a:ln>
-        </p:spPr>
-        <p:txBody>
-          <a:bodyPr rtlCol="0" anchor="ctr"/>
-          <a:lstStyle/>
-          <a:p>
-            <a:pPr algn="ctr"/>
-          </a:p>
-        </p:txBody>
-      </p:sp>
-      <p:sp>
-        <p:nvSpPr>
-          <p:cNvPr id="10" name="장식"/>
-          <p:cNvSpPr/>
-          <p:nvPr/>
-        </p:nvSpPr>
-        <p:spPr>
-          <a:xfrm>
-            <a:off x="5787680" y="427995"/>
-            <a:ext cx="294091" cy="294091"/>
-          </a:xfrm>
-          <a:prstGeom prst="ellipse">
-            <a:avLst/>
-          </a:prstGeom>
-          <a:solidFill>
-            <a:srgbClr val="868D3F"/>
-          </a:solidFill>
-          <a:ln>
-            <a:noFill/>
-          </a:ln>
-        </p:spPr>
-        <p:txBody>
-          <a:bodyPr rtlCol="0" anchor="ctr"/>
-          <a:lstStyle/>
-          <a:p>
-            <a:pPr algn="ctr"/>
-          </a:p>
-        </p:txBody>
-      </p:sp>
-      <p:sp>
-        <p:nvSpPr>
-          <p:cNvPr id="11" name="장식"/>
-          <p:cNvSpPr/>
-          <p:nvPr/>
-        </p:nvSpPr>
-        <p:spPr>
-          <a:xfrm>
-            <a:off x="6272278" y="2844566"/>
-            <a:ext cx="506986" cy="506986"/>
-          </a:xfrm>
-          <a:prstGeom prst="ellipse">
-            <a:avLst/>
-          </a:prstGeom>
-          <a:solidFill>
-            <a:srgbClr val="8C56B3"/>
-          </a:solidFill>
-          <a:ln>
-            <a:noFill/>
-          </a:ln>
-        </p:spPr>
-        <p:txBody>
-          <a:bodyPr rtlCol="0" anchor="ctr"/>
-          <a:lstStyle/>
-          <a:p>
-            <a:pPr algn="ctr"/>
-          </a:p>
-        </p:txBody>
-      </p:sp>
-      <p:sp>
-        <p:nvSpPr>
-          <p:cNvPr id="12" name="장식"/>
-          <p:cNvSpPr/>
-          <p:nvPr/>
-        </p:nvSpPr>
-        <p:spPr>
-          <a:xfrm>
-            <a:off x="5447721" y="793042"/>
-            <a:ext cx="486841" cy="486841"/>
-          </a:xfrm>
-          <a:prstGeom prst="ellipse">
-            <a:avLst/>
-          </a:prstGeom>
-          <a:solidFill>
-            <a:srgbClr val="E3D3EE"/>
-          </a:solidFill>
-          <a:ln>
-            <a:noFill/>
-          </a:ln>
-        </p:spPr>
-        <p:txBody>
-          <a:bodyPr rtlCol="0" anchor="ctr"/>
-          <a:lstStyle/>
-          <a:p>
-            <a:pPr algn="ctr"/>
-          </a:p>
-        </p:txBody>
-      </p:sp>
-      <p:sp>
-        <p:nvSpPr>
-          <p:cNvPr id="13" name="장식"/>
-          <p:cNvSpPr/>
-          <p:nvPr/>
-        </p:nvSpPr>
-        <p:spPr>
-          <a:xfrm>
-            <a:off x="4826848" y="730731"/>
-            <a:ext cx="496258" cy="496258"/>
-          </a:xfrm>
-          <a:prstGeom prst="ellipse">
-            <a:avLst/>
-          </a:prstGeom>
-          <a:solidFill>
-            <a:srgbClr val="868D3F"/>
-          </a:solidFill>
-          <a:ln>
-            <a:noFill/>
-          </a:ln>
-        </p:spPr>
-        <p:txBody>
-          <a:bodyPr rtlCol="0" anchor="ctr"/>
-          <a:lstStyle/>
-          <a:p>
-            <a:pPr algn="ctr"/>
-          </a:p>
-        </p:txBody>
-      </p:sp>
-      <p:sp>
-        <p:nvSpPr>
-          <p:cNvPr id="14" name="장식"/>
-          <p:cNvSpPr/>
-          <p:nvPr/>
-        </p:nvSpPr>
-        <p:spPr>
-          <a:xfrm>
-            <a:off x="3996532" y="21126"/>
-            <a:ext cx="405194" cy="405194"/>
-          </a:xfrm>
-          <a:prstGeom prst="ellipse">
-            <a:avLst/>
-          </a:prstGeom>
-          <a:solidFill>
-            <a:srgbClr val="8C56B3"/>
-          </a:solidFill>
-          <a:ln>
-            <a:noFill/>
-          </a:ln>
-        </p:spPr>
-        <p:txBody>
-          <a:bodyPr rtlCol="0" anchor="ctr"/>
-          <a:lstStyle/>
-          <a:p>
-            <a:pPr algn="ctr"/>
-          </a:p>
-        </p:txBody>
-      </p:sp>
-      <p:sp>
-        <p:nvSpPr>
-          <p:cNvPr id="15" name="장식"/>
-          <p:cNvSpPr/>
-          <p:nvPr/>
-        </p:nvSpPr>
-        <p:spPr>
-          <a:xfrm>
-            <a:off x="6286993" y="2861152"/>
-            <a:ext cx="241523" cy="241523"/>
-          </a:xfrm>
-          <a:prstGeom prst="ellipse">
-            <a:avLst/>
-          </a:prstGeom>
-          <a:solidFill>
-            <a:srgbClr val="E3D3EE"/>
-          </a:solidFill>
-          <a:ln>
-            <a:noFill/>
-          </a:ln>
-        </p:spPr>
-        <p:txBody>
-          <a:bodyPr rtlCol="0" anchor="ctr"/>
-          <a:lstStyle/>
-          <a:p>
-            <a:pPr algn="ctr"/>
-          </a:p>
-        </p:txBody>
-      </p:sp>
+        </p:spPr>
+      </p:pic>
       <p:sp>
         <p:nvSpPr>
           <p:cNvPr id="2" name="Title 1"/>
@@ -6983,8 +4666,8 @@
         </p:nvSpPr>
         <p:spPr>
           <a:xfrm>
-            <a:off x="480060" y="2057400"/>
-            <a:ext cx="3771900" cy="1463040"/>
+            <a:off x="685800" y="960120"/>
+            <a:ext cx="5486400" cy="1463040"/>
           </a:xfrm>
         </p:spPr>
         <p:txBody>
@@ -7011,14 +4694,14 @@
       </p:sp>
       <p:sp>
         <p:nvSpPr>
-          <p:cNvPr id="16" name="한 줄 문구"/>
+          <p:cNvPr id="4" name="한 줄 문구"/>
           <p:cNvSpPr txBox="1"/>
           <p:nvPr/>
         </p:nvSpPr>
         <p:spPr>
           <a:xfrm>
-            <a:off x="480060" y="3611880"/>
-            <a:ext cx="3429000" cy="822960"/>
+            <a:off x="685800" y="2560320"/>
+            <a:ext cx="5486400" cy="822960"/>
           </a:xfrm>
           <a:prstGeom prst="rect">
             <a:avLst/>
@@ -7049,14 +4732,14 @@
       </p:sp>
       <p:sp>
         <p:nvSpPr>
-          <p:cNvPr id="17" name="안내 문구"/>
+          <p:cNvPr id="5" name="안내 문구"/>
           <p:cNvSpPr txBox="1"/>
           <p:nvPr/>
         </p:nvSpPr>
         <p:spPr>
           <a:xfrm>
-            <a:off x="480060" y="4480560"/>
-            <a:ext cx="3429000" cy="914400"/>
+            <a:off x="685800" y="3429000"/>
+            <a:ext cx="5486400" cy="914400"/>
           </a:xfrm>
           <a:prstGeom prst="rect">
             <a:avLst/>

--- a/public/fun/pack/pptx/news/카드뉴스_11_알뜰생활팁_라일락골목.pptx
+++ b/public/fun/pack/pptx/news/카드뉴스_11_알뜰생활팁_라일락골목.pptx
@@ -3348,7 +3348,7 @@
             <a:r>
               <a:rPr sz="3000" b="1" i="0">
                 <a:solidFill>
-                  <a:srgbClr val="573371"/>
+                  <a:srgbClr val="4E226D"/>
                 </a:solidFill>
               </a:rPr>
               <a:t>장보기 전에 냉장고부터 열어 보세요</a:t>
@@ -3386,7 +3386,7 @@
             <a:r>
               <a:rPr sz="1500" b="0" i="1">
                 <a:solidFill>
-                  <a:srgbClr val="573371"/>
+                  <a:srgbClr val="4E226D"/>
                 </a:solidFill>
               </a:rPr>
               <a:t>옆으로 넘겨 보세요 →</a:t>
@@ -3473,7 +3473,7 @@
             <a:avLst/>
           </a:prstGeom>
           <a:solidFill>
-            <a:srgbClr val="E3D3EE"/>
+            <a:srgbClr val="E8D4F7"/>
           </a:solidFill>
           <a:ln>
             <a:noFill/>
@@ -3502,7 +3502,7 @@
             <a:avLst/>
           </a:prstGeom>
           <a:solidFill>
-            <a:srgbClr val="8C56B3"/>
+            <a:srgbClr val="9651C8"/>
           </a:solidFill>
           <a:ln>
             <a:noFill/>
@@ -3546,7 +3546,7 @@
             <a:r>
               <a:rPr sz="2600" b="1" i="0">
                 <a:solidFill>
-                  <a:srgbClr val="573371"/>
+                  <a:srgbClr val="4E226D"/>
                 </a:solidFill>
               </a:rPr>
               <a:t>이번 달 고정지출부터 적어요</a:t>
@@ -3584,7 +3584,7 @@
             <a:r>
               <a:rPr sz="6600" b="1" i="0">
                 <a:solidFill>
-                  <a:srgbClr val="8C56B3"/>
+                  <a:srgbClr val="9651C8"/>
                 </a:solidFill>
               </a:rPr>
               <a:t>01</a:t>
@@ -3709,7 +3709,7 @@
             <a:avLst/>
           </a:prstGeom>
           <a:solidFill>
-            <a:srgbClr val="E3D3EE"/>
+            <a:srgbClr val="E8D4F7"/>
           </a:solidFill>
           <a:ln>
             <a:noFill/>
@@ -3738,7 +3738,7 @@
             <a:avLst/>
           </a:prstGeom>
           <a:solidFill>
-            <a:srgbClr val="8C56B3"/>
+            <a:srgbClr val="9651C8"/>
           </a:solidFill>
           <a:ln>
             <a:noFill/>
@@ -3782,7 +3782,7 @@
             <a:r>
               <a:rPr sz="2600" b="1" i="0">
                 <a:solidFill>
-                  <a:srgbClr val="573371"/>
+                  <a:srgbClr val="4E226D"/>
                 </a:solidFill>
               </a:rPr>
               <a:t>카드 대신 현금 한 주</a:t>
@@ -3820,7 +3820,7 @@
             <a:r>
               <a:rPr sz="6600" b="1" i="0">
                 <a:solidFill>
-                  <a:srgbClr val="8C56B3"/>
+                  <a:srgbClr val="9651C8"/>
                 </a:solidFill>
               </a:rPr>
               <a:t>02</a:t>
@@ -3945,7 +3945,7 @@
             <a:avLst/>
           </a:prstGeom>
           <a:solidFill>
-            <a:srgbClr val="E3D3EE"/>
+            <a:srgbClr val="E8D4F7"/>
           </a:solidFill>
           <a:ln>
             <a:noFill/>
@@ -3974,7 +3974,7 @@
             <a:avLst/>
           </a:prstGeom>
           <a:solidFill>
-            <a:srgbClr val="8C56B3"/>
+            <a:srgbClr val="9651C8"/>
           </a:solidFill>
           <a:ln>
             <a:noFill/>
@@ -4018,7 +4018,7 @@
             <a:r>
               <a:rPr sz="2600" b="1" i="0">
                 <a:solidFill>
-                  <a:srgbClr val="573371"/>
+                  <a:srgbClr val="4E226D"/>
                 </a:solidFill>
               </a:rPr>
               <a:t>장보기 전 냉장고 사진</a:t>
@@ -4056,7 +4056,7 @@
             <a:r>
               <a:rPr sz="6600" b="1" i="0">
                 <a:solidFill>
-                  <a:srgbClr val="8C56B3"/>
+                  <a:srgbClr val="9651C8"/>
                 </a:solidFill>
               </a:rPr>
               <a:t>03</a:t>
@@ -4181,7 +4181,7 @@
             <a:avLst/>
           </a:prstGeom>
           <a:solidFill>
-            <a:srgbClr val="E3D3EE"/>
+            <a:srgbClr val="E8D4F7"/>
           </a:solidFill>
           <a:ln>
             <a:noFill/>
@@ -4210,7 +4210,7 @@
             <a:avLst/>
           </a:prstGeom>
           <a:solidFill>
-            <a:srgbClr val="8C56B3"/>
+            <a:srgbClr val="9651C8"/>
           </a:solidFill>
           <a:ln>
             <a:noFill/>
@@ -4254,7 +4254,7 @@
             <a:r>
               <a:rPr sz="2600" b="1" i="0">
                 <a:solidFill>
-                  <a:srgbClr val="573371"/>
+                  <a:srgbClr val="4E226D"/>
                 </a:solidFill>
               </a:rPr>
               <a:t>작은 목표 통장 만들기</a:t>
@@ -4292,7 +4292,7 @@
             <a:r>
               <a:rPr sz="6600" b="1" i="0">
                 <a:solidFill>
-                  <a:srgbClr val="8C56B3"/>
+                  <a:srgbClr val="9651C8"/>
                 </a:solidFill>
               </a:rPr>
               <a:t>04</a:t>
@@ -4417,7 +4417,7 @@
             <a:avLst/>
           </a:prstGeom>
           <a:solidFill>
-            <a:srgbClr val="E3D3EE"/>
+            <a:srgbClr val="E8D4F7"/>
           </a:solidFill>
           <a:ln>
             <a:noFill/>
@@ -4446,7 +4446,7 @@
             <a:avLst/>
           </a:prstGeom>
           <a:solidFill>
-            <a:srgbClr val="8C56B3"/>
+            <a:srgbClr val="9651C8"/>
           </a:solidFill>
           <a:ln>
             <a:noFill/>
@@ -4490,7 +4490,7 @@
             <a:r>
               <a:rPr sz="2600" b="1" i="0">
                 <a:solidFill>
-                  <a:srgbClr val="573371"/>
+                  <a:srgbClr val="4E226D"/>
                 </a:solidFill>
               </a:rPr>
               <a:t>주말 5분 가계부</a:t>
@@ -4528,7 +4528,7 @@
             <a:r>
               <a:rPr sz="6600" b="1" i="0">
                 <a:solidFill>
-                  <a:srgbClr val="8C56B3"/>
+                  <a:srgbClr val="9651C8"/>
                 </a:solidFill>
               </a:rPr>
               <a:t>05</a:t>
@@ -4684,7 +4684,7 @@
             <a:r>
               <a:rPr sz="2800" b="1" i="0">
                 <a:solidFill>
-                  <a:srgbClr val="573371"/>
+                  <a:srgbClr val="4E226D"/>
                 </a:solidFill>
               </a:rPr>
               <a:t>저장해 두고 필요할 때 꺼내 보세요</a:t>
@@ -4722,7 +4722,7 @@
             <a:r>
               <a:rPr sz="1500" b="0" i="1">
                 <a:solidFill>
-                  <a:srgbClr val="573371"/>
+                  <a:srgbClr val="4E226D"/>
                 </a:solidFill>
               </a:rPr>
               <a:t>마음에 들면 공유해 주세요</a:t>
@@ -4787,34 +4787,34 @@
         <a:sysClr val="window" lastClr="FFFFFF"/>
       </a:lt1>
       <a:dk2>
-        <a:srgbClr val="573371"/>
+        <a:srgbClr val="4E226D"/>
       </a:dk2>
       <a:lt2>
-        <a:srgbClr val="F5F1F9"/>
+        <a:srgbClr val="F8F3FC"/>
       </a:lt2>
       <a:accent1>
-        <a:srgbClr val="8C56B3"/>
+        <a:srgbClr val="9651C8"/>
       </a:accent1>
       <a:accent2>
-        <a:srgbClr val="868D3F"/>
+        <a:srgbClr val="339941"/>
       </a:accent2>
       <a:accent3>
-        <a:srgbClr val="573371"/>
+        <a:srgbClr val="4E226D"/>
       </a:accent3>
       <a:accent4>
-        <a:srgbClr val="E3D3EE"/>
+        <a:srgbClr val="E8D4F7"/>
       </a:accent4>
       <a:accent5>
-        <a:srgbClr val="897279"/>
+        <a:srgbClr val="647584"/>
       </a:accent5>
       <a:accent6>
-        <a:srgbClr val="9A85AA"/>
+        <a:srgbClr val="957AA7"/>
       </a:accent6>
       <a:hlink>
-        <a:srgbClr val="8C56B3"/>
+        <a:srgbClr val="9651C8"/>
       </a:hlink>
       <a:folHlink>
-        <a:srgbClr val="573371"/>
+        <a:srgbClr val="4E226D"/>
       </a:folHlink>
     </a:clrScheme>
     <a:fontScheme name="Office">

--- a/public/fun/pack/pptx/news/카드뉴스_11_알뜰생활팁_라일락골목.pptx
+++ b/public/fun/pack/pptx/news/카드뉴스_11_알뜰생활팁_라일락골목.pptx
@@ -3287,6 +3287,14 @@
 <file path=ppt/slides/slide1.xml><?xml version="1.0" encoding="utf-8"?>
 <p:sld xmlns:a="http://schemas.openxmlformats.org/drawingml/2006/main" xmlns:p="http://schemas.openxmlformats.org/presentationml/2006/main" xmlns:r="http://schemas.openxmlformats.org/officeDocument/2006/relationships">
   <p:cSld>
+    <p:bg>
+      <p:bgPr>
+        <a:solidFill>
+          <a:srgbClr val="F5EAFD"/>
+        </a:solidFill>
+        <a:effectLst/>
+      </p:bgPr>
+    </p:bg>
     <p:spTree>
       <p:nvGrpSpPr>
         <p:cNvPr id="1" name=""/>
@@ -3294,30 +3302,102 @@
         <p:nvPr/>
       </p:nvGrpSpPr>
       <p:grpSpPr/>
-      <p:pic>
-        <p:nvPicPr>
-          <p:cNvPr id="3" name="표지 그림" descr="news-11.jpg"/>
-          <p:cNvPicPr>
-            <a:picLocks noChangeAspect="1"/>
-          </p:cNvPicPr>
+      <p:sp>
+        <p:nvSpPr>
+          <p:cNvPr id="3" name="장식"/>
+          <p:cNvSpPr/>
           <p:nvPr/>
-        </p:nvPicPr>
-        <p:blipFill>
-          <a:blip r:embed="rId2"/>
-          <a:stretch>
-            <a:fillRect/>
-          </a:stretch>
-        </p:blipFill>
-        <p:spPr>
-          <a:xfrm>
-            <a:off x="0" y="0"/>
-            <a:ext cx="6858000" cy="6858000"/>
+        </p:nvSpPr>
+        <p:spPr>
+          <a:xfrm>
+            <a:off x="1600200" y="822960"/>
+            <a:ext cx="3657600" cy="3657600"/>
+          </a:xfrm>
+          <a:prstGeom prst="ellipse">
+            <a:avLst/>
+          </a:prstGeom>
+          <a:solidFill>
+            <a:srgbClr val="C997ED"/>
+          </a:solidFill>
+          <a:ln>
+            <a:noFill/>
+          </a:ln>
+        </p:spPr>
+        <p:txBody>
+          <a:bodyPr rtlCol="0" anchor="ctr"/>
+          <a:lstStyle/>
+          <a:p>
+            <a:pPr algn="ctr"/>
+          </a:p>
+        </p:txBody>
+      </p:sp>
+      <p:sp>
+        <p:nvSpPr>
+          <p:cNvPr id="4" name="장식"/>
+          <p:cNvSpPr/>
+          <p:nvPr/>
+        </p:nvSpPr>
+        <p:spPr>
+          <a:xfrm>
+            <a:off x="3246120" y="502920"/>
+            <a:ext cx="822960" cy="822960"/>
+          </a:xfrm>
+          <a:prstGeom prst="ellipse">
+            <a:avLst/>
+          </a:prstGeom>
+          <a:solidFill>
+            <a:srgbClr val="D2A6F2"/>
+          </a:solidFill>
+          <a:ln>
+            <a:noFill/>
+          </a:ln>
+        </p:spPr>
+        <p:txBody>
+          <a:bodyPr rtlCol="0" anchor="ctr"/>
+          <a:lstStyle/>
+          <a:p>
+            <a:pPr algn="ctr"/>
+          </a:p>
+        </p:txBody>
+      </p:sp>
+      <p:sp>
+        <p:nvSpPr>
+          <p:cNvPr id="5" name="라벨"/>
+          <p:cNvSpPr txBox="1"/>
+          <p:nvPr/>
+        </p:nvSpPr>
+        <p:spPr>
+          <a:xfrm>
+            <a:off x="731520" y="4572000"/>
+            <a:ext cx="5394960" cy="274320"/>
           </a:xfrm>
           <a:prstGeom prst="rect">
             <a:avLst/>
           </a:prstGeom>
-        </p:spPr>
-      </p:pic>
+          <a:noFill/>
+        </p:spPr>
+        <p:txBody>
+          <a:bodyPr wrap="square" lIns="54864" rIns="54864" tIns="27432" bIns="27432" anchor="t">
+            <a:noAutofit/>
+          </a:bodyPr>
+          <a:lstStyle/>
+          <a:p>
+            <a:pPr algn="ctr">
+              <a:lnSpc>
+                <a:spcPct val="115000"/>
+              </a:lnSpc>
+            </a:pPr>
+            <a:r>
+              <a:rPr sz="1000" b="1" i="0" spc="250">
+                <a:solidFill>
+                  <a:srgbClr val="26231F"/>
+                </a:solidFill>
+              </a:rPr>
+              <a:t>CARD NEWS</a:t>
+            </a:r>
+          </a:p>
+        </p:txBody>
+      </p:sp>
       <p:sp>
         <p:nvSpPr>
           <p:cNvPr id="2" name="Title 1"/>
@@ -3330,8 +3410,8 @@
         </p:nvSpPr>
         <p:spPr>
           <a:xfrm>
-            <a:off x="685800" y="960120"/>
-            <a:ext cx="5486400" cy="1463040"/>
+            <a:off x="731520" y="4892040"/>
+            <a:ext cx="5394960" cy="914400"/>
           </a:xfrm>
         </p:spPr>
         <p:txBody>
@@ -3340,7 +3420,7 @@
           </a:bodyPr>
           <a:lstStyle/>
           <a:p>
-            <a:pPr algn="l">
+            <a:pPr algn="ctr">
               <a:lnSpc>
                 <a:spcPct val="105000"/>
               </a:lnSpc>
@@ -3348,7 +3428,7 @@
             <a:r>
               <a:rPr sz="3000" b="1" i="0">
                 <a:solidFill>
-                  <a:srgbClr val="4E1E71"/>
+                  <a:srgbClr val="26231F"/>
                 </a:solidFill>
               </a:rPr>
               <a:t>장보기 전에 냉장고부터 열어 보세요</a:t>
@@ -3358,14 +3438,14 @@
       </p:sp>
       <p:sp>
         <p:nvSpPr>
-          <p:cNvPr id="4" name="한 줄 문구"/>
+          <p:cNvPr id="6" name="한 줄 문구"/>
           <p:cNvSpPr txBox="1"/>
           <p:nvPr/>
         </p:nvSpPr>
         <p:spPr>
           <a:xfrm>
-            <a:off x="685800" y="2560320"/>
-            <a:ext cx="5486400" cy="822960"/>
+            <a:off x="731520" y="5806440"/>
+            <a:ext cx="5394960" cy="822960"/>
           </a:xfrm>
           <a:prstGeom prst="rect">
             <a:avLst/>
@@ -3378,15 +3458,15 @@
           </a:bodyPr>
           <a:lstStyle/>
           <a:p>
-            <a:pPr algn="l">
+            <a:pPr algn="ctr">
               <a:lnSpc>
                 <a:spcPct val="115000"/>
               </a:lnSpc>
             </a:pPr>
             <a:r>
-              <a:rPr sz="1500" b="0" i="1">
+              <a:rPr sz="1500" b="0" i="0">
                 <a:solidFill>
-                  <a:srgbClr val="4E1E71"/>
+                  <a:srgbClr val="26231F"/>
                 </a:solidFill>
               </a:rPr>
               <a:t>옆으로 넘겨 보세요 →</a:t>
@@ -3396,14 +3476,14 @@
       </p:sp>
       <p:sp>
         <p:nvSpPr>
-          <p:cNvPr id="5" name="안내 문구"/>
+          <p:cNvPr id="7" name="안내 문구"/>
           <p:cNvSpPr txBox="1"/>
           <p:nvPr/>
         </p:nvSpPr>
         <p:spPr>
           <a:xfrm>
-            <a:off x="685800" y="3429000"/>
-            <a:ext cx="5486400" cy="914400"/>
+            <a:off x="731520" y="6675120"/>
+            <a:ext cx="5394960" cy="914400"/>
           </a:xfrm>
           <a:prstGeom prst="rect">
             <a:avLst/>
@@ -3416,7 +3496,7 @@
           </a:bodyPr>
           <a:lstStyle/>
           <a:p>
-            <a:pPr algn="l">
+            <a:pPr algn="ctr">
               <a:lnSpc>
                 <a:spcPct val="115000"/>
               </a:lnSpc>
@@ -3424,7 +3504,7 @@
             <a:r>
               <a:rPr sz="1200" b="0" i="0">
                 <a:solidFill>
-                  <a:srgbClr val="666666"/>
+                  <a:srgbClr val="26231F"/>
                 </a:solidFill>
               </a:rPr>
               <a:t>알뜰 생활 팁 · 카드뉴스</a:t>
@@ -3460,20 +3540,20 @@
       <p:grpSpPr/>
       <p:sp>
         <p:nvSpPr>
-          <p:cNvPr id="3" name="장식"/>
+          <p:cNvPr id="3" name="포인트"/>
           <p:cNvSpPr/>
           <p:nvPr/>
         </p:nvSpPr>
         <p:spPr>
           <a:xfrm>
-            <a:off x="4572000" y="-1463040"/>
-            <a:ext cx="3840480" cy="3840480"/>
-          </a:xfrm>
-          <a:prstGeom prst="ellipse">
+            <a:off x="3291840" y="246888"/>
+            <a:ext cx="274320" cy="274320"/>
+          </a:xfrm>
+          <a:prstGeom prst="donut">
             <a:avLst/>
           </a:prstGeom>
           <a:solidFill>
-            <a:srgbClr val="EDDAFB"/>
+            <a:srgbClr val="C997ED"/>
           </a:solidFill>
           <a:ln>
             <a:noFill/>
@@ -3495,14 +3575,14 @@
         </p:nvSpPr>
         <p:spPr>
           <a:xfrm>
-            <a:off x="5760720" y="274320"/>
-            <a:ext cx="411480" cy="411480"/>
-          </a:xfrm>
-          <a:prstGeom prst="ellipse">
+            <a:off x="3017520" y="1572768"/>
+            <a:ext cx="822960" cy="22860"/>
+          </a:xfrm>
+          <a:prstGeom prst="rect">
             <a:avLst/>
           </a:prstGeom>
           <a:solidFill>
-            <a:srgbClr val="9E56D2"/>
+            <a:srgbClr val="C997ED"/>
           </a:solidFill>
           <a:ln>
             <a:noFill/>
@@ -3518,52 +3598,14 @@
       </p:sp>
       <p:sp>
         <p:nvSpPr>
-          <p:cNvPr id="2" name="Title 1"/>
-          <p:cNvSpPr>
-            <a:spLocks noGrp="1"/>
-          </p:cNvSpPr>
-          <p:nvPr>
-            <p:ph type="title"/>
-          </p:nvPr>
-        </p:nvSpPr>
-        <p:spPr>
-          <a:xfrm>
-            <a:off x="640080" y="457200"/>
-            <a:ext cx="4389120" cy="868680"/>
-          </a:xfrm>
-        </p:spPr>
-        <p:txBody>
-          <a:bodyPr wrap="square" lIns="54864" rIns="54864" tIns="27432" bIns="27432" anchor="ctr">
-            <a:noAutofit/>
-          </a:bodyPr>
-          <a:lstStyle/>
-          <a:p>
-            <a:pPr algn="l">
-              <a:lnSpc>
-                <a:spcPct val="105000"/>
-              </a:lnSpc>
-            </a:pPr>
-            <a:r>
-              <a:rPr sz="2600" b="1" i="0">
-                <a:solidFill>
-                  <a:srgbClr val="4E1E71"/>
-                </a:solidFill>
-              </a:rPr>
-              <a:t>이번 달 고정지출부터 적어요</a:t>
-            </a:r>
-          </a:p>
-        </p:txBody>
-      </p:sp>
-      <p:sp>
-        <p:nvSpPr>
-          <p:cNvPr id="5" name="번호"/>
+          <p:cNvPr id="5" name="상단 라벨"/>
           <p:cNvSpPr txBox="1"/>
           <p:nvPr/>
         </p:nvSpPr>
         <p:spPr>
           <a:xfrm>
-            <a:off x="640080" y="1691640"/>
-            <a:ext cx="2194560" cy="1280160"/>
+            <a:off x="640080" y="182880"/>
+            <a:ext cx="3657600" cy="274320"/>
           </a:xfrm>
           <a:prstGeom prst="rect">
             <a:avLst/>
@@ -3571,7 +3613,7 @@
           <a:noFill/>
         </p:spPr>
         <p:txBody>
-          <a:bodyPr wrap="square" lIns="54864" rIns="54864" tIns="27432" bIns="27432" anchor="t">
+          <a:bodyPr wrap="square" lIns="54864" rIns="54864" tIns="27432" bIns="27432" anchor="ctr">
             <a:noAutofit/>
           </a:bodyPr>
           <a:lstStyle/>
@@ -3582,9 +3624,85 @@
               </a:lnSpc>
             </a:pPr>
             <a:r>
+              <a:rPr sz="800" b="1" i="0" spc="250">
+                <a:solidFill>
+                  <a:srgbClr val="8E8780"/>
+                </a:solidFill>
+              </a:rPr>
+              <a:t>CARD NEWS</a:t>
+            </a:r>
+          </a:p>
+        </p:txBody>
+      </p:sp>
+      <p:sp>
+        <p:nvSpPr>
+          <p:cNvPr id="2" name="Title 1"/>
+          <p:cNvSpPr>
+            <a:spLocks noGrp="1"/>
+          </p:cNvSpPr>
+          <p:nvPr>
+            <p:ph type="title"/>
+          </p:nvPr>
+        </p:nvSpPr>
+        <p:spPr>
+          <a:xfrm>
+            <a:off x="1371600" y="640080"/>
+            <a:ext cx="4114800" cy="868680"/>
+          </a:xfrm>
+        </p:spPr>
+        <p:txBody>
+          <a:bodyPr wrap="square" lIns="54864" rIns="54864" tIns="27432" bIns="27432" anchor="ctr">
+            <a:noAutofit/>
+          </a:bodyPr>
+          <a:lstStyle/>
+          <a:p>
+            <a:pPr algn="ctr">
+              <a:lnSpc>
+                <a:spcPct val="105000"/>
+              </a:lnSpc>
+            </a:pPr>
+            <a:r>
+              <a:rPr sz="2600" b="1" i="0">
+                <a:solidFill>
+                  <a:srgbClr val="26231F"/>
+                </a:solidFill>
+              </a:rPr>
+              <a:t>이번 달 고정지출부터 적어요</a:t>
+            </a:r>
+          </a:p>
+        </p:txBody>
+      </p:sp>
+      <p:sp>
+        <p:nvSpPr>
+          <p:cNvPr id="6" name="번호"/>
+          <p:cNvSpPr txBox="1"/>
+          <p:nvPr/>
+        </p:nvSpPr>
+        <p:spPr>
+          <a:xfrm>
+            <a:off x="640080" y="1874519"/>
+            <a:ext cx="2194560" cy="1280160"/>
+          </a:xfrm>
+          <a:prstGeom prst="rect">
+            <a:avLst/>
+          </a:prstGeom>
+          <a:noFill/>
+        </p:spPr>
+        <p:txBody>
+          <a:bodyPr wrap="square" lIns="54864" rIns="54864" tIns="27432" bIns="27432" anchor="t">
+            <a:noAutofit/>
+          </a:bodyPr>
+          <a:lstStyle/>
+          <a:p>
+            <a:pPr algn="l">
+              <a:lnSpc>
+                <a:spcPct val="115000"/>
+              </a:lnSpc>
+            </a:pPr>
+            <a:r>
               <a:rPr sz="6600" b="1" i="0">
                 <a:solidFill>
-                  <a:srgbClr val="9E56D2"/>
+                  <a:srgbClr val="C997ED"/>
                 </a:solidFill>
               </a:rPr>
               <a:t>01</a:t>
@@ -3594,13 +3712,13 @@
       </p:sp>
       <p:sp>
         <p:nvSpPr>
-          <p:cNvPr id="6" name="본문"/>
+          <p:cNvPr id="7" name="본문"/>
           <p:cNvSpPr txBox="1"/>
           <p:nvPr/>
         </p:nvSpPr>
         <p:spPr>
           <a:xfrm>
-            <a:off x="640080" y="3154680"/>
+            <a:off x="640080" y="3337560"/>
             <a:ext cx="5577840" cy="2651760"/>
           </a:xfrm>
           <a:prstGeom prst="rect">
@@ -3622,7 +3740,7 @@
             <a:r>
               <a:rPr sz="2800" b="0" i="0">
                 <a:solidFill>
-                  <a:srgbClr val="2B2B2B"/>
+                  <a:srgbClr val="26231F"/>
                 </a:solidFill>
               </a:rPr>
               <a:t>월세·통신비·구독료처럼 매달 나가는 돈부터 한곳에 적어 보면 새는 곳이 보여요.</a:t>
@@ -3632,13 +3750,13 @@
       </p:sp>
       <p:sp>
         <p:nvSpPr>
-          <p:cNvPr id="7" name="쪽 번호"/>
+          <p:cNvPr id="8" name="쪽 번호"/>
           <p:cNvSpPr txBox="1"/>
           <p:nvPr/>
         </p:nvSpPr>
         <p:spPr>
           <a:xfrm>
-            <a:off x="640080" y="6035040"/>
+            <a:off x="640080" y="5989320"/>
             <a:ext cx="5577840" cy="365760"/>
           </a:xfrm>
           <a:prstGeom prst="rect">
@@ -3696,20 +3814,20 @@
       <p:grpSpPr/>
       <p:sp>
         <p:nvSpPr>
-          <p:cNvPr id="3" name="장식"/>
+          <p:cNvPr id="3" name="포인트"/>
           <p:cNvSpPr/>
           <p:nvPr/>
         </p:nvSpPr>
         <p:spPr>
           <a:xfrm>
-            <a:off x="4572000" y="-1463040"/>
-            <a:ext cx="3840480" cy="3840480"/>
-          </a:xfrm>
-          <a:prstGeom prst="ellipse">
+            <a:off x="3291840" y="246888"/>
+            <a:ext cx="274320" cy="274320"/>
+          </a:xfrm>
+          <a:prstGeom prst="donut">
             <a:avLst/>
           </a:prstGeom>
           <a:solidFill>
-            <a:srgbClr val="EDDAFB"/>
+            <a:srgbClr val="C997ED"/>
           </a:solidFill>
           <a:ln>
             <a:noFill/>
@@ -3731,14 +3849,14 @@
         </p:nvSpPr>
         <p:spPr>
           <a:xfrm>
-            <a:off x="5760720" y="274320"/>
-            <a:ext cx="411480" cy="411480"/>
-          </a:xfrm>
-          <a:prstGeom prst="ellipse">
+            <a:off x="3017520" y="1572768"/>
+            <a:ext cx="822960" cy="22860"/>
+          </a:xfrm>
+          <a:prstGeom prst="rect">
             <a:avLst/>
           </a:prstGeom>
           <a:solidFill>
-            <a:srgbClr val="9E56D2"/>
+            <a:srgbClr val="C997ED"/>
           </a:solidFill>
           <a:ln>
             <a:noFill/>
@@ -3754,52 +3872,14 @@
       </p:sp>
       <p:sp>
         <p:nvSpPr>
-          <p:cNvPr id="2" name="Title 1"/>
-          <p:cNvSpPr>
-            <a:spLocks noGrp="1"/>
-          </p:cNvSpPr>
-          <p:nvPr>
-            <p:ph type="title"/>
-          </p:nvPr>
-        </p:nvSpPr>
-        <p:spPr>
-          <a:xfrm>
-            <a:off x="640080" y="457200"/>
-            <a:ext cx="4389120" cy="868680"/>
-          </a:xfrm>
-        </p:spPr>
-        <p:txBody>
-          <a:bodyPr wrap="square" lIns="54864" rIns="54864" tIns="27432" bIns="27432" anchor="ctr">
-            <a:noAutofit/>
-          </a:bodyPr>
-          <a:lstStyle/>
-          <a:p>
-            <a:pPr algn="l">
-              <a:lnSpc>
-                <a:spcPct val="105000"/>
-              </a:lnSpc>
-            </a:pPr>
-            <a:r>
-              <a:rPr sz="2600" b="1" i="0">
-                <a:solidFill>
-                  <a:srgbClr val="4E1E71"/>
-                </a:solidFill>
-              </a:rPr>
-              <a:t>카드 대신 현금 한 주</a:t>
-            </a:r>
-          </a:p>
-        </p:txBody>
-      </p:sp>
-      <p:sp>
-        <p:nvSpPr>
-          <p:cNvPr id="5" name="번호"/>
+          <p:cNvPr id="5" name="상단 라벨"/>
           <p:cNvSpPr txBox="1"/>
           <p:nvPr/>
         </p:nvSpPr>
         <p:spPr>
           <a:xfrm>
-            <a:off x="640080" y="1691640"/>
-            <a:ext cx="2194560" cy="1280160"/>
+            <a:off x="640080" y="182880"/>
+            <a:ext cx="3657600" cy="274320"/>
           </a:xfrm>
           <a:prstGeom prst="rect">
             <a:avLst/>
@@ -3807,7 +3887,7 @@
           <a:noFill/>
         </p:spPr>
         <p:txBody>
-          <a:bodyPr wrap="square" lIns="54864" rIns="54864" tIns="27432" bIns="27432" anchor="t">
+          <a:bodyPr wrap="square" lIns="54864" rIns="54864" tIns="27432" bIns="27432" anchor="ctr">
             <a:noAutofit/>
           </a:bodyPr>
           <a:lstStyle/>
@@ -3818,9 +3898,85 @@
               </a:lnSpc>
             </a:pPr>
             <a:r>
+              <a:rPr sz="800" b="1" i="0" spc="250">
+                <a:solidFill>
+                  <a:srgbClr val="8E8780"/>
+                </a:solidFill>
+              </a:rPr>
+              <a:t>CARD NEWS</a:t>
+            </a:r>
+          </a:p>
+        </p:txBody>
+      </p:sp>
+      <p:sp>
+        <p:nvSpPr>
+          <p:cNvPr id="2" name="Title 1"/>
+          <p:cNvSpPr>
+            <a:spLocks noGrp="1"/>
+          </p:cNvSpPr>
+          <p:nvPr>
+            <p:ph type="title"/>
+          </p:nvPr>
+        </p:nvSpPr>
+        <p:spPr>
+          <a:xfrm>
+            <a:off x="1371600" y="640080"/>
+            <a:ext cx="4114800" cy="868680"/>
+          </a:xfrm>
+        </p:spPr>
+        <p:txBody>
+          <a:bodyPr wrap="square" lIns="54864" rIns="54864" tIns="27432" bIns="27432" anchor="ctr">
+            <a:noAutofit/>
+          </a:bodyPr>
+          <a:lstStyle/>
+          <a:p>
+            <a:pPr algn="ctr">
+              <a:lnSpc>
+                <a:spcPct val="105000"/>
+              </a:lnSpc>
+            </a:pPr>
+            <a:r>
+              <a:rPr sz="2600" b="1" i="0">
+                <a:solidFill>
+                  <a:srgbClr val="26231F"/>
+                </a:solidFill>
+              </a:rPr>
+              <a:t>카드 대신 현금 한 주</a:t>
+            </a:r>
+          </a:p>
+        </p:txBody>
+      </p:sp>
+      <p:sp>
+        <p:nvSpPr>
+          <p:cNvPr id="6" name="번호"/>
+          <p:cNvSpPr txBox="1"/>
+          <p:nvPr/>
+        </p:nvSpPr>
+        <p:spPr>
+          <a:xfrm>
+            <a:off x="640080" y="1874519"/>
+            <a:ext cx="2194560" cy="1280160"/>
+          </a:xfrm>
+          <a:prstGeom prst="rect">
+            <a:avLst/>
+          </a:prstGeom>
+          <a:noFill/>
+        </p:spPr>
+        <p:txBody>
+          <a:bodyPr wrap="square" lIns="54864" rIns="54864" tIns="27432" bIns="27432" anchor="t">
+            <a:noAutofit/>
+          </a:bodyPr>
+          <a:lstStyle/>
+          <a:p>
+            <a:pPr algn="l">
+              <a:lnSpc>
+                <a:spcPct val="115000"/>
+              </a:lnSpc>
+            </a:pPr>
+            <a:r>
               <a:rPr sz="6600" b="1" i="0">
                 <a:solidFill>
-                  <a:srgbClr val="9E56D2"/>
+                  <a:srgbClr val="C997ED"/>
                 </a:solidFill>
               </a:rPr>
               <a:t>02</a:t>
@@ -3830,13 +3986,13 @@
       </p:sp>
       <p:sp>
         <p:nvSpPr>
-          <p:cNvPr id="6" name="본문"/>
+          <p:cNvPr id="7" name="본문"/>
           <p:cNvSpPr txBox="1"/>
           <p:nvPr/>
         </p:nvSpPr>
         <p:spPr>
           <a:xfrm>
-            <a:off x="640080" y="3154680"/>
+            <a:off x="640080" y="3337560"/>
             <a:ext cx="5577840" cy="2651760"/>
           </a:xfrm>
           <a:prstGeom prst="rect">
@@ -3858,7 +4014,7 @@
             <a:r>
               <a:rPr sz="2800" b="0" i="0">
                 <a:solidFill>
-                  <a:srgbClr val="2B2B2B"/>
+                  <a:srgbClr val="26231F"/>
                 </a:solidFill>
               </a:rPr>
               <a:t>일주일만 현금으로 써 보면 충동구매가 눈에 띄게 줄어요.</a:t>
@@ -3868,13 +4024,13 @@
       </p:sp>
       <p:sp>
         <p:nvSpPr>
-          <p:cNvPr id="7" name="쪽 번호"/>
+          <p:cNvPr id="8" name="쪽 번호"/>
           <p:cNvSpPr txBox="1"/>
           <p:nvPr/>
         </p:nvSpPr>
         <p:spPr>
           <a:xfrm>
-            <a:off x="640080" y="6035040"/>
+            <a:off x="640080" y="5989320"/>
             <a:ext cx="5577840" cy="365760"/>
           </a:xfrm>
           <a:prstGeom prst="rect">
@@ -3932,20 +4088,20 @@
       <p:grpSpPr/>
       <p:sp>
         <p:nvSpPr>
-          <p:cNvPr id="3" name="장식"/>
+          <p:cNvPr id="3" name="포인트"/>
           <p:cNvSpPr/>
           <p:nvPr/>
         </p:nvSpPr>
         <p:spPr>
           <a:xfrm>
-            <a:off x="4572000" y="-1463040"/>
-            <a:ext cx="3840480" cy="3840480"/>
-          </a:xfrm>
-          <a:prstGeom prst="ellipse">
+            <a:off x="3291840" y="246888"/>
+            <a:ext cx="274320" cy="274320"/>
+          </a:xfrm>
+          <a:prstGeom prst="donut">
             <a:avLst/>
           </a:prstGeom>
           <a:solidFill>
-            <a:srgbClr val="EDDAFB"/>
+            <a:srgbClr val="C997ED"/>
           </a:solidFill>
           <a:ln>
             <a:noFill/>
@@ -3967,14 +4123,14 @@
         </p:nvSpPr>
         <p:spPr>
           <a:xfrm>
-            <a:off x="5760720" y="274320"/>
-            <a:ext cx="411480" cy="411480"/>
-          </a:xfrm>
-          <a:prstGeom prst="ellipse">
+            <a:off x="3017520" y="1572768"/>
+            <a:ext cx="822960" cy="22860"/>
+          </a:xfrm>
+          <a:prstGeom prst="rect">
             <a:avLst/>
           </a:prstGeom>
           <a:solidFill>
-            <a:srgbClr val="9E56D2"/>
+            <a:srgbClr val="C997ED"/>
           </a:solidFill>
           <a:ln>
             <a:noFill/>
@@ -3990,52 +4146,14 @@
       </p:sp>
       <p:sp>
         <p:nvSpPr>
-          <p:cNvPr id="2" name="Title 1"/>
-          <p:cNvSpPr>
-            <a:spLocks noGrp="1"/>
-          </p:cNvSpPr>
-          <p:nvPr>
-            <p:ph type="title"/>
-          </p:nvPr>
-        </p:nvSpPr>
-        <p:spPr>
-          <a:xfrm>
-            <a:off x="640080" y="457200"/>
-            <a:ext cx="4389120" cy="868680"/>
-          </a:xfrm>
-        </p:spPr>
-        <p:txBody>
-          <a:bodyPr wrap="square" lIns="54864" rIns="54864" tIns="27432" bIns="27432" anchor="ctr">
-            <a:noAutofit/>
-          </a:bodyPr>
-          <a:lstStyle/>
-          <a:p>
-            <a:pPr algn="l">
-              <a:lnSpc>
-                <a:spcPct val="105000"/>
-              </a:lnSpc>
-            </a:pPr>
-            <a:r>
-              <a:rPr sz="2600" b="1" i="0">
-                <a:solidFill>
-                  <a:srgbClr val="4E1E71"/>
-                </a:solidFill>
-              </a:rPr>
-              <a:t>장보기 전 냉장고 사진</a:t>
-            </a:r>
-          </a:p>
-        </p:txBody>
-      </p:sp>
-      <p:sp>
-        <p:nvSpPr>
-          <p:cNvPr id="5" name="번호"/>
+          <p:cNvPr id="5" name="상단 라벨"/>
           <p:cNvSpPr txBox="1"/>
           <p:nvPr/>
         </p:nvSpPr>
         <p:spPr>
           <a:xfrm>
-            <a:off x="640080" y="1691640"/>
-            <a:ext cx="2194560" cy="1280160"/>
+            <a:off x="640080" y="182880"/>
+            <a:ext cx="3657600" cy="274320"/>
           </a:xfrm>
           <a:prstGeom prst="rect">
             <a:avLst/>
@@ -4043,7 +4161,7 @@
           <a:noFill/>
         </p:spPr>
         <p:txBody>
-          <a:bodyPr wrap="square" lIns="54864" rIns="54864" tIns="27432" bIns="27432" anchor="t">
+          <a:bodyPr wrap="square" lIns="54864" rIns="54864" tIns="27432" bIns="27432" anchor="ctr">
             <a:noAutofit/>
           </a:bodyPr>
           <a:lstStyle/>
@@ -4054,9 +4172,85 @@
               </a:lnSpc>
             </a:pPr>
             <a:r>
+              <a:rPr sz="800" b="1" i="0" spc="250">
+                <a:solidFill>
+                  <a:srgbClr val="8E8780"/>
+                </a:solidFill>
+              </a:rPr>
+              <a:t>CARD NEWS</a:t>
+            </a:r>
+          </a:p>
+        </p:txBody>
+      </p:sp>
+      <p:sp>
+        <p:nvSpPr>
+          <p:cNvPr id="2" name="Title 1"/>
+          <p:cNvSpPr>
+            <a:spLocks noGrp="1"/>
+          </p:cNvSpPr>
+          <p:nvPr>
+            <p:ph type="title"/>
+          </p:nvPr>
+        </p:nvSpPr>
+        <p:spPr>
+          <a:xfrm>
+            <a:off x="1371600" y="640080"/>
+            <a:ext cx="4114800" cy="868680"/>
+          </a:xfrm>
+        </p:spPr>
+        <p:txBody>
+          <a:bodyPr wrap="square" lIns="54864" rIns="54864" tIns="27432" bIns="27432" anchor="ctr">
+            <a:noAutofit/>
+          </a:bodyPr>
+          <a:lstStyle/>
+          <a:p>
+            <a:pPr algn="ctr">
+              <a:lnSpc>
+                <a:spcPct val="105000"/>
+              </a:lnSpc>
+            </a:pPr>
+            <a:r>
+              <a:rPr sz="2600" b="1" i="0">
+                <a:solidFill>
+                  <a:srgbClr val="26231F"/>
+                </a:solidFill>
+              </a:rPr>
+              <a:t>장보기 전 냉장고 사진</a:t>
+            </a:r>
+          </a:p>
+        </p:txBody>
+      </p:sp>
+      <p:sp>
+        <p:nvSpPr>
+          <p:cNvPr id="6" name="번호"/>
+          <p:cNvSpPr txBox="1"/>
+          <p:nvPr/>
+        </p:nvSpPr>
+        <p:spPr>
+          <a:xfrm>
+            <a:off x="640080" y="1874519"/>
+            <a:ext cx="2194560" cy="1280160"/>
+          </a:xfrm>
+          <a:prstGeom prst="rect">
+            <a:avLst/>
+          </a:prstGeom>
+          <a:noFill/>
+        </p:spPr>
+        <p:txBody>
+          <a:bodyPr wrap="square" lIns="54864" rIns="54864" tIns="27432" bIns="27432" anchor="t">
+            <a:noAutofit/>
+          </a:bodyPr>
+          <a:lstStyle/>
+          <a:p>
+            <a:pPr algn="l">
+              <a:lnSpc>
+                <a:spcPct val="115000"/>
+              </a:lnSpc>
+            </a:pPr>
+            <a:r>
               <a:rPr sz="6600" b="1" i="0">
                 <a:solidFill>
-                  <a:srgbClr val="9E56D2"/>
+                  <a:srgbClr val="C997ED"/>
                 </a:solidFill>
               </a:rPr>
               <a:t>03</a:t>
@@ -4066,13 +4260,13 @@
       </p:sp>
       <p:sp>
         <p:nvSpPr>
-          <p:cNvPr id="6" name="본문"/>
+          <p:cNvPr id="7" name="본문"/>
           <p:cNvSpPr txBox="1"/>
           <p:nvPr/>
         </p:nvSpPr>
         <p:spPr>
           <a:xfrm>
-            <a:off x="640080" y="3154680"/>
+            <a:off x="640080" y="3337560"/>
             <a:ext cx="5577840" cy="2651760"/>
           </a:xfrm>
           <a:prstGeom prst="rect">
@@ -4094,7 +4288,7 @@
             <a:r>
               <a:rPr sz="2800" b="0" i="0">
                 <a:solidFill>
-                  <a:srgbClr val="2B2B2B"/>
+                  <a:srgbClr val="26231F"/>
                 </a:solidFill>
               </a:rPr>
               <a:t>있는 재료를 확인하고 가면 같은 식재료를 또 사는 일이 줄어요.</a:t>
@@ -4104,13 +4298,13 @@
       </p:sp>
       <p:sp>
         <p:nvSpPr>
-          <p:cNvPr id="7" name="쪽 번호"/>
+          <p:cNvPr id="8" name="쪽 번호"/>
           <p:cNvSpPr txBox="1"/>
           <p:nvPr/>
         </p:nvSpPr>
         <p:spPr>
           <a:xfrm>
-            <a:off x="640080" y="6035040"/>
+            <a:off x="640080" y="5989320"/>
             <a:ext cx="5577840" cy="365760"/>
           </a:xfrm>
           <a:prstGeom prst="rect">
@@ -4168,20 +4362,20 @@
       <p:grpSpPr/>
       <p:sp>
         <p:nvSpPr>
-          <p:cNvPr id="3" name="장식"/>
+          <p:cNvPr id="3" name="포인트"/>
           <p:cNvSpPr/>
           <p:nvPr/>
         </p:nvSpPr>
         <p:spPr>
           <a:xfrm>
-            <a:off x="4572000" y="-1463040"/>
-            <a:ext cx="3840480" cy="3840480"/>
-          </a:xfrm>
-          <a:prstGeom prst="ellipse">
+            <a:off x="3291840" y="246888"/>
+            <a:ext cx="274320" cy="274320"/>
+          </a:xfrm>
+          <a:prstGeom prst="donut">
             <a:avLst/>
           </a:prstGeom>
           <a:solidFill>
-            <a:srgbClr val="EDDAFB"/>
+            <a:srgbClr val="C997ED"/>
           </a:solidFill>
           <a:ln>
             <a:noFill/>
@@ -4203,14 +4397,14 @@
         </p:nvSpPr>
         <p:spPr>
           <a:xfrm>
-            <a:off x="5760720" y="274320"/>
-            <a:ext cx="411480" cy="411480"/>
-          </a:xfrm>
-          <a:prstGeom prst="ellipse">
+            <a:off x="3017520" y="1572768"/>
+            <a:ext cx="822960" cy="22860"/>
+          </a:xfrm>
+          <a:prstGeom prst="rect">
             <a:avLst/>
           </a:prstGeom>
           <a:solidFill>
-            <a:srgbClr val="9E56D2"/>
+            <a:srgbClr val="C997ED"/>
           </a:solidFill>
           <a:ln>
             <a:noFill/>
@@ -4226,52 +4420,14 @@
       </p:sp>
       <p:sp>
         <p:nvSpPr>
-          <p:cNvPr id="2" name="Title 1"/>
-          <p:cNvSpPr>
-            <a:spLocks noGrp="1"/>
-          </p:cNvSpPr>
-          <p:nvPr>
-            <p:ph type="title"/>
-          </p:nvPr>
-        </p:nvSpPr>
-        <p:spPr>
-          <a:xfrm>
-            <a:off x="640080" y="457200"/>
-            <a:ext cx="4389120" cy="868680"/>
-          </a:xfrm>
-        </p:spPr>
-        <p:txBody>
-          <a:bodyPr wrap="square" lIns="54864" rIns="54864" tIns="27432" bIns="27432" anchor="ctr">
-            <a:noAutofit/>
-          </a:bodyPr>
-          <a:lstStyle/>
-          <a:p>
-            <a:pPr algn="l">
-              <a:lnSpc>
-                <a:spcPct val="105000"/>
-              </a:lnSpc>
-            </a:pPr>
-            <a:r>
-              <a:rPr sz="2600" b="1" i="0">
-                <a:solidFill>
-                  <a:srgbClr val="4E1E71"/>
-                </a:solidFill>
-              </a:rPr>
-              <a:t>작은 목표 통장 만들기</a:t>
-            </a:r>
-          </a:p>
-        </p:txBody>
-      </p:sp>
-      <p:sp>
-        <p:nvSpPr>
-          <p:cNvPr id="5" name="번호"/>
+          <p:cNvPr id="5" name="상단 라벨"/>
           <p:cNvSpPr txBox="1"/>
           <p:nvPr/>
         </p:nvSpPr>
         <p:spPr>
           <a:xfrm>
-            <a:off x="640080" y="1691640"/>
-            <a:ext cx="2194560" cy="1280160"/>
+            <a:off x="640080" y="182880"/>
+            <a:ext cx="3657600" cy="274320"/>
           </a:xfrm>
           <a:prstGeom prst="rect">
             <a:avLst/>
@@ -4279,7 +4435,7 @@
           <a:noFill/>
         </p:spPr>
         <p:txBody>
-          <a:bodyPr wrap="square" lIns="54864" rIns="54864" tIns="27432" bIns="27432" anchor="t">
+          <a:bodyPr wrap="square" lIns="54864" rIns="54864" tIns="27432" bIns="27432" anchor="ctr">
             <a:noAutofit/>
           </a:bodyPr>
           <a:lstStyle/>
@@ -4290,9 +4446,85 @@
               </a:lnSpc>
             </a:pPr>
             <a:r>
+              <a:rPr sz="800" b="1" i="0" spc="250">
+                <a:solidFill>
+                  <a:srgbClr val="8E8780"/>
+                </a:solidFill>
+              </a:rPr>
+              <a:t>CARD NEWS</a:t>
+            </a:r>
+          </a:p>
+        </p:txBody>
+      </p:sp>
+      <p:sp>
+        <p:nvSpPr>
+          <p:cNvPr id="2" name="Title 1"/>
+          <p:cNvSpPr>
+            <a:spLocks noGrp="1"/>
+          </p:cNvSpPr>
+          <p:nvPr>
+            <p:ph type="title"/>
+          </p:nvPr>
+        </p:nvSpPr>
+        <p:spPr>
+          <a:xfrm>
+            <a:off x="1371600" y="640080"/>
+            <a:ext cx="4114800" cy="868680"/>
+          </a:xfrm>
+        </p:spPr>
+        <p:txBody>
+          <a:bodyPr wrap="square" lIns="54864" rIns="54864" tIns="27432" bIns="27432" anchor="ctr">
+            <a:noAutofit/>
+          </a:bodyPr>
+          <a:lstStyle/>
+          <a:p>
+            <a:pPr algn="ctr">
+              <a:lnSpc>
+                <a:spcPct val="105000"/>
+              </a:lnSpc>
+            </a:pPr>
+            <a:r>
+              <a:rPr sz="2600" b="1" i="0">
+                <a:solidFill>
+                  <a:srgbClr val="26231F"/>
+                </a:solidFill>
+              </a:rPr>
+              <a:t>작은 목표 통장 만들기</a:t>
+            </a:r>
+          </a:p>
+        </p:txBody>
+      </p:sp>
+      <p:sp>
+        <p:nvSpPr>
+          <p:cNvPr id="6" name="번호"/>
+          <p:cNvSpPr txBox="1"/>
+          <p:nvPr/>
+        </p:nvSpPr>
+        <p:spPr>
+          <a:xfrm>
+            <a:off x="640080" y="1874519"/>
+            <a:ext cx="2194560" cy="1280160"/>
+          </a:xfrm>
+          <a:prstGeom prst="rect">
+            <a:avLst/>
+          </a:prstGeom>
+          <a:noFill/>
+        </p:spPr>
+        <p:txBody>
+          <a:bodyPr wrap="square" lIns="54864" rIns="54864" tIns="27432" bIns="27432" anchor="t">
+            <a:noAutofit/>
+          </a:bodyPr>
+          <a:lstStyle/>
+          <a:p>
+            <a:pPr algn="l">
+              <a:lnSpc>
+                <a:spcPct val="115000"/>
+              </a:lnSpc>
+            </a:pPr>
+            <a:r>
               <a:rPr sz="6600" b="1" i="0">
                 <a:solidFill>
-                  <a:srgbClr val="9E56D2"/>
+                  <a:srgbClr val="C997ED"/>
                 </a:solidFill>
               </a:rPr>
               <a:t>04</a:t>
@@ -4302,13 +4534,13 @@
       </p:sp>
       <p:sp>
         <p:nvSpPr>
-          <p:cNvPr id="6" name="본문"/>
+          <p:cNvPr id="7" name="본문"/>
           <p:cNvSpPr txBox="1"/>
           <p:nvPr/>
         </p:nvSpPr>
         <p:spPr>
           <a:xfrm>
-            <a:off x="640080" y="3154680"/>
+            <a:off x="640080" y="3337560"/>
             <a:ext cx="5577840" cy="2651760"/>
           </a:xfrm>
           <a:prstGeom prst="rect">
@@ -4330,7 +4562,7 @@
             <a:r>
               <a:rPr sz="2800" b="0" i="0">
                 <a:solidFill>
-                  <a:srgbClr val="2B2B2B"/>
+                  <a:srgbClr val="26231F"/>
                 </a:solidFill>
               </a:rPr>
               <a:t>여행·선물·비상금처럼 이름을 붙이면 모으는 재미가 커져요.</a:t>
@@ -4340,13 +4572,13 @@
       </p:sp>
       <p:sp>
         <p:nvSpPr>
-          <p:cNvPr id="7" name="쪽 번호"/>
+          <p:cNvPr id="8" name="쪽 번호"/>
           <p:cNvSpPr txBox="1"/>
           <p:nvPr/>
         </p:nvSpPr>
         <p:spPr>
           <a:xfrm>
-            <a:off x="640080" y="6035040"/>
+            <a:off x="640080" y="5989320"/>
             <a:ext cx="5577840" cy="365760"/>
           </a:xfrm>
           <a:prstGeom prst="rect">
@@ -4404,20 +4636,20 @@
       <p:grpSpPr/>
       <p:sp>
         <p:nvSpPr>
-          <p:cNvPr id="3" name="장식"/>
+          <p:cNvPr id="3" name="포인트"/>
           <p:cNvSpPr/>
           <p:nvPr/>
         </p:nvSpPr>
         <p:spPr>
           <a:xfrm>
-            <a:off x="4572000" y="-1463040"/>
-            <a:ext cx="3840480" cy="3840480"/>
-          </a:xfrm>
-          <a:prstGeom prst="ellipse">
+            <a:off x="3291840" y="246888"/>
+            <a:ext cx="274320" cy="274320"/>
+          </a:xfrm>
+          <a:prstGeom prst="donut">
             <a:avLst/>
           </a:prstGeom>
           <a:solidFill>
-            <a:srgbClr val="EDDAFB"/>
+            <a:srgbClr val="C997ED"/>
           </a:solidFill>
           <a:ln>
             <a:noFill/>
@@ -4439,14 +4671,14 @@
         </p:nvSpPr>
         <p:spPr>
           <a:xfrm>
-            <a:off x="5760720" y="274320"/>
-            <a:ext cx="411480" cy="411480"/>
-          </a:xfrm>
-          <a:prstGeom prst="ellipse">
+            <a:off x="3017520" y="1572768"/>
+            <a:ext cx="822960" cy="22860"/>
+          </a:xfrm>
+          <a:prstGeom prst="rect">
             <a:avLst/>
           </a:prstGeom>
           <a:solidFill>
-            <a:srgbClr val="9E56D2"/>
+            <a:srgbClr val="C997ED"/>
           </a:solidFill>
           <a:ln>
             <a:noFill/>
@@ -4462,52 +4694,14 @@
       </p:sp>
       <p:sp>
         <p:nvSpPr>
-          <p:cNvPr id="2" name="Title 1"/>
-          <p:cNvSpPr>
-            <a:spLocks noGrp="1"/>
-          </p:cNvSpPr>
-          <p:nvPr>
-            <p:ph type="title"/>
-          </p:nvPr>
-        </p:nvSpPr>
-        <p:spPr>
-          <a:xfrm>
-            <a:off x="640080" y="457200"/>
-            <a:ext cx="4389120" cy="868680"/>
-          </a:xfrm>
-        </p:spPr>
-        <p:txBody>
-          <a:bodyPr wrap="square" lIns="54864" rIns="54864" tIns="27432" bIns="27432" anchor="ctr">
-            <a:noAutofit/>
-          </a:bodyPr>
-          <a:lstStyle/>
-          <a:p>
-            <a:pPr algn="l">
-              <a:lnSpc>
-                <a:spcPct val="105000"/>
-              </a:lnSpc>
-            </a:pPr>
-            <a:r>
-              <a:rPr sz="2600" b="1" i="0">
-                <a:solidFill>
-                  <a:srgbClr val="4E1E71"/>
-                </a:solidFill>
-              </a:rPr>
-              <a:t>주말 5분 가계부</a:t>
-            </a:r>
-          </a:p>
-        </p:txBody>
-      </p:sp>
-      <p:sp>
-        <p:nvSpPr>
-          <p:cNvPr id="5" name="번호"/>
+          <p:cNvPr id="5" name="상단 라벨"/>
           <p:cNvSpPr txBox="1"/>
           <p:nvPr/>
         </p:nvSpPr>
         <p:spPr>
           <a:xfrm>
-            <a:off x="640080" y="1691640"/>
-            <a:ext cx="2194560" cy="1280160"/>
+            <a:off x="640080" y="182880"/>
+            <a:ext cx="3657600" cy="274320"/>
           </a:xfrm>
           <a:prstGeom prst="rect">
             <a:avLst/>
@@ -4515,7 +4709,7 @@
           <a:noFill/>
         </p:spPr>
         <p:txBody>
-          <a:bodyPr wrap="square" lIns="54864" rIns="54864" tIns="27432" bIns="27432" anchor="t">
+          <a:bodyPr wrap="square" lIns="54864" rIns="54864" tIns="27432" bIns="27432" anchor="ctr">
             <a:noAutofit/>
           </a:bodyPr>
           <a:lstStyle/>
@@ -4526,9 +4720,85 @@
               </a:lnSpc>
             </a:pPr>
             <a:r>
+              <a:rPr sz="800" b="1" i="0" spc="250">
+                <a:solidFill>
+                  <a:srgbClr val="8E8780"/>
+                </a:solidFill>
+              </a:rPr>
+              <a:t>CARD NEWS</a:t>
+            </a:r>
+          </a:p>
+        </p:txBody>
+      </p:sp>
+      <p:sp>
+        <p:nvSpPr>
+          <p:cNvPr id="2" name="Title 1"/>
+          <p:cNvSpPr>
+            <a:spLocks noGrp="1"/>
+          </p:cNvSpPr>
+          <p:nvPr>
+            <p:ph type="title"/>
+          </p:nvPr>
+        </p:nvSpPr>
+        <p:spPr>
+          <a:xfrm>
+            <a:off x="1371600" y="640080"/>
+            <a:ext cx="4114800" cy="868680"/>
+          </a:xfrm>
+        </p:spPr>
+        <p:txBody>
+          <a:bodyPr wrap="square" lIns="54864" rIns="54864" tIns="27432" bIns="27432" anchor="ctr">
+            <a:noAutofit/>
+          </a:bodyPr>
+          <a:lstStyle/>
+          <a:p>
+            <a:pPr algn="ctr">
+              <a:lnSpc>
+                <a:spcPct val="105000"/>
+              </a:lnSpc>
+            </a:pPr>
+            <a:r>
+              <a:rPr sz="2600" b="1" i="0">
+                <a:solidFill>
+                  <a:srgbClr val="26231F"/>
+                </a:solidFill>
+              </a:rPr>
+              <a:t>주말 5분 가계부</a:t>
+            </a:r>
+          </a:p>
+        </p:txBody>
+      </p:sp>
+      <p:sp>
+        <p:nvSpPr>
+          <p:cNvPr id="6" name="번호"/>
+          <p:cNvSpPr txBox="1"/>
+          <p:nvPr/>
+        </p:nvSpPr>
+        <p:spPr>
+          <a:xfrm>
+            <a:off x="640080" y="1874519"/>
+            <a:ext cx="2194560" cy="1280160"/>
+          </a:xfrm>
+          <a:prstGeom prst="rect">
+            <a:avLst/>
+          </a:prstGeom>
+          <a:noFill/>
+        </p:spPr>
+        <p:txBody>
+          <a:bodyPr wrap="square" lIns="54864" rIns="54864" tIns="27432" bIns="27432" anchor="t">
+            <a:noAutofit/>
+          </a:bodyPr>
+          <a:lstStyle/>
+          <a:p>
+            <a:pPr algn="l">
+              <a:lnSpc>
+                <a:spcPct val="115000"/>
+              </a:lnSpc>
+            </a:pPr>
+            <a:r>
               <a:rPr sz="6600" b="1" i="0">
                 <a:solidFill>
-                  <a:srgbClr val="9E56D2"/>
+                  <a:srgbClr val="C997ED"/>
                 </a:solidFill>
               </a:rPr>
               <a:t>05</a:t>
@@ -4538,13 +4808,13 @@
       </p:sp>
       <p:sp>
         <p:nvSpPr>
-          <p:cNvPr id="6" name="본문"/>
+          <p:cNvPr id="7" name="본문"/>
           <p:cNvSpPr txBox="1"/>
           <p:nvPr/>
         </p:nvSpPr>
         <p:spPr>
           <a:xfrm>
-            <a:off x="640080" y="3154680"/>
+            <a:off x="640080" y="3337560"/>
             <a:ext cx="5577840" cy="2651760"/>
           </a:xfrm>
           <a:prstGeom prst="rect">
@@ -4566,7 +4836,7 @@
             <a:r>
               <a:rPr sz="2800" b="0" i="0">
                 <a:solidFill>
-                  <a:srgbClr val="2B2B2B"/>
+                  <a:srgbClr val="26231F"/>
                 </a:solidFill>
               </a:rPr>
               <a:t>영수증을 모아 두었다가 주말에 5분만 적어 보세요.</a:t>
@@ -4576,13 +4846,13 @@
       </p:sp>
       <p:sp>
         <p:nvSpPr>
-          <p:cNvPr id="7" name="쪽 번호"/>
+          <p:cNvPr id="8" name="쪽 번호"/>
           <p:cNvSpPr txBox="1"/>
           <p:nvPr/>
         </p:nvSpPr>
         <p:spPr>
           <a:xfrm>
-            <a:off x="640080" y="6035040"/>
+            <a:off x="640080" y="5989320"/>
             <a:ext cx="5577840" cy="365760"/>
           </a:xfrm>
           <a:prstGeom prst="rect">
@@ -4623,6 +4893,14 @@
 <file path=ppt/slides/slide7.xml><?xml version="1.0" encoding="utf-8"?>
 <p:sld xmlns:a="http://schemas.openxmlformats.org/drawingml/2006/main" xmlns:p="http://schemas.openxmlformats.org/presentationml/2006/main" xmlns:r="http://schemas.openxmlformats.org/officeDocument/2006/relationships">
   <p:cSld>
+    <p:bg>
+      <p:bgPr>
+        <a:solidFill>
+          <a:srgbClr val="F5EAFD"/>
+        </a:solidFill>
+        <a:effectLst/>
+      </p:bgPr>
+    </p:bg>
     <p:spTree>
       <p:nvGrpSpPr>
         <p:cNvPr id="1" name=""/>
@@ -4630,30 +4908,102 @@
         <p:nvPr/>
       </p:nvGrpSpPr>
       <p:grpSpPr/>
-      <p:pic>
-        <p:nvPicPr>
-          <p:cNvPr id="3" name="표지 그림" descr="news-11.jpg"/>
-          <p:cNvPicPr>
-            <a:picLocks noChangeAspect="1"/>
-          </p:cNvPicPr>
+      <p:sp>
+        <p:nvSpPr>
+          <p:cNvPr id="3" name="장식"/>
+          <p:cNvSpPr/>
           <p:nvPr/>
-        </p:nvPicPr>
-        <p:blipFill>
-          <a:blip r:embed="rId2"/>
-          <a:stretch>
-            <a:fillRect/>
-          </a:stretch>
-        </p:blipFill>
-        <p:spPr>
-          <a:xfrm>
-            <a:off x="0" y="0"/>
-            <a:ext cx="6858000" cy="6858000"/>
+        </p:nvSpPr>
+        <p:spPr>
+          <a:xfrm>
+            <a:off x="1600200" y="822960"/>
+            <a:ext cx="3657600" cy="3657600"/>
+          </a:xfrm>
+          <a:prstGeom prst="ellipse">
+            <a:avLst/>
+          </a:prstGeom>
+          <a:solidFill>
+            <a:srgbClr val="C997ED"/>
+          </a:solidFill>
+          <a:ln>
+            <a:noFill/>
+          </a:ln>
+        </p:spPr>
+        <p:txBody>
+          <a:bodyPr rtlCol="0" anchor="ctr"/>
+          <a:lstStyle/>
+          <a:p>
+            <a:pPr algn="ctr"/>
+          </a:p>
+        </p:txBody>
+      </p:sp>
+      <p:sp>
+        <p:nvSpPr>
+          <p:cNvPr id="4" name="장식"/>
+          <p:cNvSpPr/>
+          <p:nvPr/>
+        </p:nvSpPr>
+        <p:spPr>
+          <a:xfrm>
+            <a:off x="3246120" y="502920"/>
+            <a:ext cx="822960" cy="822960"/>
+          </a:xfrm>
+          <a:prstGeom prst="ellipse">
+            <a:avLst/>
+          </a:prstGeom>
+          <a:solidFill>
+            <a:srgbClr val="D2A6F2"/>
+          </a:solidFill>
+          <a:ln>
+            <a:noFill/>
+          </a:ln>
+        </p:spPr>
+        <p:txBody>
+          <a:bodyPr rtlCol="0" anchor="ctr"/>
+          <a:lstStyle/>
+          <a:p>
+            <a:pPr algn="ctr"/>
+          </a:p>
+        </p:txBody>
+      </p:sp>
+      <p:sp>
+        <p:nvSpPr>
+          <p:cNvPr id="5" name="라벨"/>
+          <p:cNvSpPr txBox="1"/>
+          <p:nvPr/>
+        </p:nvSpPr>
+        <p:spPr>
+          <a:xfrm>
+            <a:off x="731520" y="4572000"/>
+            <a:ext cx="5394960" cy="274320"/>
           </a:xfrm>
           <a:prstGeom prst="rect">
             <a:avLst/>
           </a:prstGeom>
-        </p:spPr>
-      </p:pic>
+          <a:noFill/>
+        </p:spPr>
+        <p:txBody>
+          <a:bodyPr wrap="square" lIns="54864" rIns="54864" tIns="27432" bIns="27432" anchor="t">
+            <a:noAutofit/>
+          </a:bodyPr>
+          <a:lstStyle/>
+          <a:p>
+            <a:pPr algn="ctr">
+              <a:lnSpc>
+                <a:spcPct val="115000"/>
+              </a:lnSpc>
+            </a:pPr>
+            <a:r>
+              <a:rPr sz="1000" b="1" i="0" spc="250">
+                <a:solidFill>
+                  <a:srgbClr val="26231F"/>
+                </a:solidFill>
+              </a:rPr>
+              <a:t>CARD NEWS</a:t>
+            </a:r>
+          </a:p>
+        </p:txBody>
+      </p:sp>
       <p:sp>
         <p:nvSpPr>
           <p:cNvPr id="2" name="Title 1"/>
@@ -4666,8 +5016,8 @@
         </p:nvSpPr>
         <p:spPr>
           <a:xfrm>
-            <a:off x="685800" y="960120"/>
-            <a:ext cx="5486400" cy="1463040"/>
+            <a:off x="731520" y="4892040"/>
+            <a:ext cx="5394960" cy="914400"/>
           </a:xfrm>
         </p:spPr>
         <p:txBody>
@@ -4676,7 +5026,7 @@
           </a:bodyPr>
           <a:lstStyle/>
           <a:p>
-            <a:pPr algn="l">
+            <a:pPr algn="ctr">
               <a:lnSpc>
                 <a:spcPct val="105000"/>
               </a:lnSpc>
@@ -4684,7 +5034,7 @@
             <a:r>
               <a:rPr sz="2800" b="1" i="0">
                 <a:solidFill>
-                  <a:srgbClr val="4E1E71"/>
+                  <a:srgbClr val="26231F"/>
                 </a:solidFill>
               </a:rPr>
               <a:t>저장해 두고 필요할 때 꺼내 보세요</a:t>
@@ -4694,14 +5044,14 @@
       </p:sp>
       <p:sp>
         <p:nvSpPr>
-          <p:cNvPr id="4" name="한 줄 문구"/>
+          <p:cNvPr id="6" name="한 줄 문구"/>
           <p:cNvSpPr txBox="1"/>
           <p:nvPr/>
         </p:nvSpPr>
         <p:spPr>
           <a:xfrm>
-            <a:off x="685800" y="2560320"/>
-            <a:ext cx="5486400" cy="822960"/>
+            <a:off x="731520" y="5806440"/>
+            <a:ext cx="5394960" cy="822960"/>
           </a:xfrm>
           <a:prstGeom prst="rect">
             <a:avLst/>
@@ -4714,15 +5064,15 @@
           </a:bodyPr>
           <a:lstStyle/>
           <a:p>
-            <a:pPr algn="l">
+            <a:pPr algn="ctr">
               <a:lnSpc>
                 <a:spcPct val="115000"/>
               </a:lnSpc>
             </a:pPr>
             <a:r>
-              <a:rPr sz="1500" b="0" i="1">
+              <a:rPr sz="1500" b="0" i="0">
                 <a:solidFill>
-                  <a:srgbClr val="4E1E71"/>
+                  <a:srgbClr val="26231F"/>
                 </a:solidFill>
               </a:rPr>
               <a:t>마음에 들면 공유해 주세요</a:t>
@@ -4732,14 +5082,14 @@
       </p:sp>
       <p:sp>
         <p:nvSpPr>
-          <p:cNvPr id="5" name="안내 문구"/>
+          <p:cNvPr id="7" name="안내 문구"/>
           <p:cNvSpPr txBox="1"/>
           <p:nvPr/>
         </p:nvSpPr>
         <p:spPr>
           <a:xfrm>
-            <a:off x="685800" y="3429000"/>
-            <a:ext cx="5486400" cy="914400"/>
+            <a:off x="731520" y="6675120"/>
+            <a:ext cx="5394960" cy="914400"/>
           </a:xfrm>
           <a:prstGeom prst="rect">
             <a:avLst/>
@@ -4752,7 +5102,7 @@
           </a:bodyPr>
           <a:lstStyle/>
           <a:p>
-            <a:pPr algn="l">
+            <a:pPr algn="ctr">
               <a:lnSpc>
                 <a:spcPct val="115000"/>
               </a:lnSpc>
@@ -4760,7 +5110,7 @@
             <a:r>
               <a:rPr sz="1200" b="0" i="0">
                 <a:solidFill>
-                  <a:srgbClr val="666666"/>
+                  <a:srgbClr val="26231F"/>
                 </a:solidFill>
               </a:rPr>
               <a:t>이름 · 연락처를 입력하세요</a:t>
@@ -4787,34 +5137,34 @@
         <a:sysClr val="window" lastClr="FFFFFF"/>
       </a:lt1>
       <a:dk2>
-        <a:srgbClr val="4E1E71"/>
+        <a:srgbClr val="3B2749"/>
       </a:dk2>
       <a:lt2>
-        <a:srgbClr val="F9F4FD"/>
+        <a:srgbClr val="F5EAFD"/>
       </a:lt2>
       <a:accent1>
-        <a:srgbClr val="9E56D2"/>
+        <a:srgbClr val="C997ED"/>
       </a:accent1>
       <a:accent2>
-        <a:srgbClr val="30A640"/>
+        <a:srgbClr val="F3BAF0"/>
       </a:accent2>
       <a:accent3>
-        <a:srgbClr val="4E1E71"/>
+        <a:srgbClr val="3B2749"/>
       </a:accent3>
       <a:accent4>
-        <a:srgbClr val="EDDAFB"/>
+        <a:srgbClr val="E9D1FA"/>
       </a:accent4>
       <a:accent5>
-        <a:srgbClr val="677E89"/>
+        <a:srgbClr val="DEA8EE"/>
       </a:accent5>
       <a:accent6>
-        <a:srgbClr val="9578AA"/>
+        <a:srgbClr val="897D92"/>
       </a:accent6>
       <a:hlink>
-        <a:srgbClr val="9E56D2"/>
+        <a:srgbClr val="C997ED"/>
       </a:hlink>
       <a:folHlink>
-        <a:srgbClr val="4E1E71"/>
+        <a:srgbClr val="3B2749"/>
       </a:folHlink>
     </a:clrScheme>
     <a:fontScheme name="Office">
